--- a/it/slides/17-Architettura_dei_Calcolatori-Verm1_Parte_3.pptx
+++ b/it/slides/17-Architettura_dei_Calcolatori-Verm1_Parte_3.pptx
@@ -119,7 +119,7 @@
   <p:extLst>
     <p:ext uri="{521415D9-36F7-43E2-AB2F-B90AF26B5E84}">
       <p14:sectionLst xmlns:p14="http://schemas.microsoft.com/office/powerpoint/2010/main">
-        <p14:section name="Apertura" id="{f6401530-5f65-b755-5c76-185dd3784a77}">
+        <p14:section name="Apertura" id="{1e9ddf50-9946-3f11-0ad9-b65c7ef1e477}">
           <p14:sldIdLst>
             <p14:sldId id="256"/>
             <p14:sldId id="257"/>
@@ -127,14 +127,14 @@
             <p14:sldId id="259"/>
           </p14:sldIdLst>
         </p14:section>
-        <p14:section name="Il progetto, prima del codice" id="{f9f37263-38a1-0f0a-c3d4-9e1f398890fc}">
+        <p14:section name="Il progetto, prima del codice" id="{2fc39347-d419-502d-3329-17c8660100fd}">
           <p14:sldIdLst>
             <p14:sldId id="260"/>
             <p14:sldId id="261"/>
             <p14:sldId id="262"/>
           </p14:sldIdLst>
         </p14:section>
-        <p14:section name="Passo 5: guardare la memoria muoversi" id="{768c24e8-313e-670b-60dc-5f7506b833aa}">
+        <p14:section name="Passo 5: guardare la memoria muoversi" id="{82e041ae-865f-8a74-8c4e-e838ab059af3}">
           <p14:sldIdLst>
             <p14:sldId id="263"/>
             <p14:sldId id="264"/>
@@ -2689,7 +2689,63 @@
       </p:sp>
       <p:sp>
         <p:nvSpPr>
-          <p:cNvPr id="13" name="Shape 11"/>
+          <p:cNvPr id="13" name="Text 11"/>
+          <p:cNvSpPr txBox="1"/>
+          <p:nvPr/>
+        </p:nvSpPr>
+        <p:spPr>
+          <a:xfrm>
+            <a:off x="4693615" y="566928"/>
+            <a:ext cx="6949440" cy="640080"/>
+          </a:xfrm>
+          <a:prstGeom prst="rect">
+            <a:avLst/>
+          </a:prstGeom>
+          <a:noFill/>
+          <a:ln/>
+        </p:spPr>
+        <p:txBody>
+          <a:bodyPr wrap="square" lIns="0" tIns="0" rIns="0" bIns="0" rtlCol="0" anchor="t"/>
+          <a:lstStyle/>
+          <a:p>
+            <a:pPr algn="r" indent="0" marL="0">
+              <a:buNone/>
+            </a:pPr>
+            <a:r>
+              <a:rPr lang="en-US" sz="1300" dirty="0">
+                <a:solidFill>
+                  <a:srgbClr val="CFE3EA"/>
+                </a:solidFill>
+                <a:latin typeface="Calibri" pitchFamily="34" charset="0"/>
+                <a:ea typeface="Calibri" pitchFamily="34" charset="-122"/>
+                <a:cs typeface="Calibri" pitchFamily="34" charset="-120"/>
+              </a:rPr>
+              <a:t>Presentazione della lezione. I listati, il programma completo e come provarlo sono nella presentazione del codice:</a:t>
+            </a:r>
+            <a:endParaRPr lang="en-US" sz="1300" dirty="0"/>
+          </a:p>
+          <a:p>
+            <a:pPr algn="r" indent="0" marL="0">
+              <a:buNone/>
+            </a:pPr>
+            <a:r>
+              <a:rPr lang="en-US" sz="1300" dirty="0">
+                <a:solidFill>
+                  <a:srgbClr val="CFE3EA"/>
+                </a:solidFill>
+                <a:latin typeface="Calibri" pitchFamily="34" charset="0"/>
+                <a:ea typeface="Calibri" pitchFamily="34" charset="-122"/>
+                <a:cs typeface="Calibri" pitchFamily="34" charset="-120"/>
+              </a:rPr>
+              <a:t>17-Architettura_dei_Calcolatori-Verm1_Parte_3-Codice.pptx</a:t>
+            </a:r>
+            <a:endParaRPr lang="en-US" sz="1300" dirty="0"/>
+          </a:p>
+        </p:txBody>
+      </p:sp>
+      <p:sp>
+        <p:nvSpPr>
+          <p:cNvPr id="14" name="Shape 12"/>
           <p:cNvSpPr/>
           <p:nvPr/>
         </p:nvSpPr>
@@ -2716,7 +2772,7 @@
       </p:sp>
       <p:pic>
         <p:nvPicPr>
-          <p:cNvPr id="14" name="Image 0" descr="/Users/raffaelemontella/devel/riscv-prg32/computer-architecture-with-prg32/tools/assets/verm1_p3_play.png">    </p:cNvPr>
+          <p:cNvPr id="15" name="Image 0" descr="/Users/raffaelemontella/devel/riscv-prg32/computer-architecture-with-prg32/tools/assets/verm1_p3_play.png">    </p:cNvPr>
           <p:cNvPicPr>
             <a:picLocks noChangeAspect="1"/>
           </p:cNvPicPr>

--- a/it/slides/17-Architettura_dei_Calcolatori-Verm1_Parte_3.pptx
+++ b/it/slides/17-Architettura_dei_Calcolatori-Verm1_Parte_3.pptx
@@ -119,7 +119,7 @@
   <p:extLst>
     <p:ext uri="{521415D9-36F7-43E2-AB2F-B90AF26B5E84}">
       <p14:sectionLst xmlns:p14="http://schemas.microsoft.com/office/powerpoint/2010/main">
-        <p14:section name="Apertura" id="{1e9ddf50-9946-3f11-0ad9-b65c7ef1e477}">
+        <p14:section name="Apertura" id="{1a41598b-ef18-fbb0-8fe9-0797f446dc68}">
           <p14:sldIdLst>
             <p14:sldId id="256"/>
             <p14:sldId id="257"/>
@@ -127,14 +127,14 @@
             <p14:sldId id="259"/>
           </p14:sldIdLst>
         </p14:section>
-        <p14:section name="Il progetto, prima del codice" id="{2fc39347-d419-502d-3329-17c8660100fd}">
+        <p14:section name="Il progetto, prima del codice" id="{d5a93d58-537b-c0af-1b0a-42f609269ee0}">
           <p14:sldIdLst>
             <p14:sldId id="260"/>
             <p14:sldId id="261"/>
             <p14:sldId id="262"/>
           </p14:sldIdLst>
         </p14:section>
-        <p14:section name="Passo 5: guardare la memoria muoversi" id="{82e041ae-865f-8a74-8c4e-e838ab059af3}">
+        <p14:section name="Passo 5: guardare la memoria muoversi" id="{fdf6cd32-6966-0cb1-37aa-45d2dc7e6eb6}">
           <p14:sldIdLst>
             <p14:sldId id="263"/>
             <p14:sldId id="264"/>
@@ -549,6 +549,8 @@
             <a:r>
               <a:rPr lang="en-US" dirty="0"/>
               <a:t>Il terzo tutorial trasforma Verm1 in un vero gioco. Finora il verme era una sola cella e niente poteva andare storto. Oggi nel progetto entra la memoria: il verme prende un corpo che segue la testa e cresce, mordersi fa finire la partita, e il programma acquista una schermata del titolo e una di fine partita. La frase di Brooks in copertina è il motto del giorno: scegliete bene le strutture dati, e il codice quasi si scrive da solo. Ne incontrerete due, un anello e una mappa.
+Stato di apprendimento: DA COMPRENDERE OGGI, alla fine di questa lezione lo spiegate, lo seguite passo passo e lo applicate da soli; DA UTILIZZARE OGGI, oggi seguite e usate la ricetta; come funziona dentro si spiega più avanti, o non fa parte del corso; DA COMPRENDERE PIÙ AVANTI, riconoscete il nome e lo scopo; lo spiega una lezione successiva. Una slide senza etichetta è contesto: una storia, un esempio, una domanda, un esercizio.
+Stato di apprendimento di questa lezione. DA COMPRENDERE OGGI: gli array in memoria; macchine a stati finiti; .text, .rodata, .data; latch e flip-flop; la virgola fissa. DA UTILIZZARE OGGI: la convenzione di chiamata (Lezione 18) e, usati senza essere studiati nel corso, gli strumenti di PRG32, il debugger di PRG32-QT. DA COMPRENDERE PIÙ AVANTI: niente. Una slide senza etichetta è contesto: una storia, un esempio, una domanda, un esercizio.
 Per il docente: Terzo tutorial del progetto. Usa le Lezioni da 13 a 16: macchine a stati finiti e rilevamento del fronte (13), registri che conservano il valore precedente (14), la memoria come vettore di byte, indirizzi e indici (15), ciò che resta nel file della cartuccia e ciò che si perde allo spegnimento (16). Il file di riferimento è verm1/verm1_part3.S. La citazione è la seconda metà dell'osservazione di Brooks su diagrammi di flusso e tabelle: con «strutture dati» al posto di «tabelle» è il motto di questa parte.</a:t>
             </a:r>
             <a:endParaRPr lang="en-US" dirty="0"/>
@@ -638,6 +640,7 @@
             <a:r>
               <a:rPr lang="en-US" dirty="0"/>
               <a:t>Tre domande a cui rispondere con il debugger. Dov'è state, e che cosa contiene mentre giocate e perdete? La mappa è coerente con l'anello: il byte alla riga per 40 più la colonna della testa contiene 1? Che cosa ha visto il passo fatale: alla lbu dopo la seconda mul in step, t1 vale 1 una volta sola, al morso. L'ultima riga è un principio: un programma è giusto quando è giusta la sua memoria.
+DA UTILIZZARE OGGI: il debugger di PRG32-QT (si usa, non si studia, in questo corso).
 Per il docente: La terza domanda è la più istruttiva: s0 e s1 contengono la cella in cui la testa voleva entrare, e lo schermo mostra che fa parte del corpo.</a:t>
             </a:r>
             <a:endParaRPr lang="en-US" dirty="0"/>
@@ -909,6 +912,7 @@
             <a:r>
               <a:rPr lang="en-US" dirty="0"/>
               <a:t>Dove siete. Verm1 ora è un gioco, con uno scopo, un rischio, un inizio e una fine, e ne sapete spiegare ogni riga. È logica sequenziale e memoria scritte come programma: una macchina a tre stati, un anello di byte, una mappa. Tre cose sono ancora grezze: l'intero schermo viene ridisegnato a ogni frame, il punteggio è una fila di tacche, la velocità non cambia mai. Le prossime quattro lezioni aprono la macchina che esegue il vostro codice, e la Parte 4 finisce il gioco.
+Stato di apprendimento, riepilogo. DA COMPRENDERE OGGI: gli array in memoria; macchine a stati finiti; .text, .rodata, .data; latch e flip-flop; la virgola fissa. DA UTILIZZARE OGGI: la convenzione di chiamata (Lezione 18) e, usati senza essere studiati nel corso, gli strumenti di PRG32, il debugger di PRG32-QT. DA COMPRENDERE PIÙ AVANTI: niente. Una slide senza etichetta è contesto: una storia, un esempio, una domanda, un esercizio.
 Per il docente: Gli studenti hanno ora circa 450 righe di assembly che hanno scritto e sanno spiegare. Le prossime quattro lezioni aprono la macchina che le esegue.</a:t>
             </a:r>
             <a:endParaRPr lang="en-US" dirty="0"/>
@@ -1264,6 +1268,7 @@
             <a:r>
               <a:rPr lang="en-US" dirty="0"/>
               <a:t>Il corpo è memorizzato in due vettori di 256 byte, body_x e body_y: l'elemento k contiene la colonna e la riga di un segmento. Non si sposta mai nulla. Due numeri descrivono il verme: head_i, l'elemento della testa, e length, il numero di elementi in uso; la coda è l'elemento head_i - length + 1. Un passo scrive un elemento nuovo dopo la testa e fa avanzare head_i. Se il verme ha mangiato la coda resta; altrimenti avanza anche lei. Dopo l'elemento 255 viene l'elemento 0, cioè un AND con 255: il vettore è un anello.
+DA COMPRENDERE OGGI: gli array in memoria.
 Per il docente: Un buffer circolare, la struttura che sta dietro ogni coda FIFO (first in, first out); l'aritmetica degli indirizzi è quella della Lezione 15. Muovere un verme di 200 celle costa quanto muoverne uno di 3. La dimensione 256 è scelta perché il ritorno a capo sia un solo AND: una potenza di due.</a:t>
             </a:r>
             <a:endParaRPr lang="en-US" dirty="0"/>
@@ -1353,6 +1358,7 @@
             <a:r>
               <a:rPr lang="en-US" dirty="0"/>
               <a:t>Per sapere se la nuova testa tocca il corpo, il programma potrebbe confrontarla con ogni segmento: fino a 255 confronti a ogni passo. Tiene invece una mappa del mondo: un byte per ciascuna delle 960 celle, 1 se c'è un segmento e 0 se no. La cella in colonna c della riga r è il byte numero r per 40 più c. Un passo pone a 1 un byte e ne azzera uno, e il test di collisione diventa un solo load. È il classico scambio di memoria con tempo. Il prezzo: mappa e anello devono essere sempre d'accordo.
+DA COMPRENDERE OGGI: gli array in memoria.
 Per il docente: Memoria in cambio di tempo: lo scambio classico. La mappa e l'anello dicono la stessa cosa in due modi, e il programma deve tenerli coerenti: ogni scrittura nell'una è accoppiata a una scrittura nell'altro.</a:t>
             </a:r>
             <a:endParaRPr lang="en-US" dirty="0"/>
@@ -1442,6 +1448,7 @@
             <a:r>
               <a:rPr lang="en-US" dirty="0"/>
               <a:t>Il diagramma degli stati del gioco, come nella Lezione 13: TITLE va a PLAY quando si preme A; PLAY va a OVER quando il verme si morde; OVER torna a TITLE quando si preme A. La tabella aggiunge l'azione di ogni transizione. Un dettaglio decide se la macchina funziona: «A premuto» significa giù adesso e su un frame fa, un fronte e non un livello. Altrimenti tenendo premuto A si attraverserebbero gli stati uno per frame.
+DA COMPRENDERE OGGI: macchine a stati finiti.
 Per il docente: Il diagramma e la tabella della Lezione 13, per il nostro gioco. In ogni altro caso lo stato non cambia. Disegnarlo alla lavagna prima di mostrare il codice: il codice è una trascrizione.</a:t>
             </a:r>
             <a:endParaRPr lang="en-US" dirty="0"/>
@@ -1531,6 +1538,7 @@
             <a:r>
               <a:rPr lang="en-US" dirty="0"/>
               <a:t>Mettete un breakpoint sulla prima istruzione di step e riprendete: il programma ora si ferma una volta per passo del verme. Aprite la memoria all'indirizzo di body_x: dopo l'iniziale 03 04 05 compare un byte nuovo a ogni passo. Girate verso il basso: body_x ripete la stessa colonna, mentre body_y, 256 byte più avanti, conta le righe. Mangiate, e confrontate head_i e length prima e dopo: sono cresciuti entrambi di uno. I vecchi byte non vengono mai cancellati: l'anello conserva la storia degli ultimi 256 passi.
+DA UTILIZZARE OGGI: il debugger di PRG32-QT (si usa, non si studia, in questo corso).
 Per il docente: I byte delle vecchie posizioni non vengono mai cancellati: l'anello conserva tutta la storia degli ultimi 256 passi, e length dice quanta di essa è ancora verme. Dopo 256 passi la scrittura ricomincia dal primo byte.</a:t>
             </a:r>
             <a:endParaRPr lang="en-US" dirty="0"/>
@@ -1620,6 +1628,7 @@
             <a:r>
               <a:rPr lang="en-US" dirty="0"/>
               <a:t>Il fronte del pulsante A, frame per frame. Finché A è su tutto vale zero. Nel frame in cui A scende, s0 vale 0x10 e prev_btn vale ancora 0: l'AND con la negazione dà 0x10, e la transizione avviene. Nei frame successivi A è ancora giù, ma ora anche prev_btn vale 0x10, e il risultato è zero. Un fronte, una transizione, per quanto a lungo si tenga premuto il pulsante.
+DA UTILIZZARE OGGI: il debugger di PRG32-QT (si usa, non si studia, in questo corso).
 Per il docente: Mettere un breakpoint su and s1, s0, t1 in verm1_update, tenere premuto A e premere Resume tre volte: s1 vale 0x10 in un solo frame. Il test del file di riferimento tiene premuto A per 28 frame e verifica che avvenga esattamente una transizione.</a:t>
             </a:r>
             <a:endParaRPr lang="en-US" dirty="0"/>
@@ -2796,6 +2805,420 @@
       </p:pic>
       <p:sp>
         <p:nvSpPr>
+          <p:cNvPr id="16" name="Shape 13"/>
+          <p:cNvSpPr/>
+          <p:nvPr/>
+        </p:nvSpPr>
+        <p:spPr>
+          <a:xfrm>
+            <a:off x="8910777" y="91440"/>
+            <a:ext cx="2732278" cy="274320"/>
+          </a:xfrm>
+          <a:prstGeom prst="rect">
+            <a:avLst/>
+          </a:prstGeom>
+          <a:solidFill>
+            <a:srgbClr val="F3E8FF"/>
+          </a:solidFill>
+          <a:ln w="12700">
+            <a:solidFill>
+              <a:srgbClr val="7E22CE"/>
+            </a:solidFill>
+            <a:prstDash val="dash"/>
+          </a:ln>
+        </p:spPr>
+      </p:sp>
+      <p:sp>
+        <p:nvSpPr>
+          <p:cNvPr id="17" name="Shape 14"/>
+          <p:cNvSpPr/>
+          <p:nvPr/>
+        </p:nvSpPr>
+        <p:spPr>
+          <a:xfrm>
+            <a:off x="8938209" y="128016"/>
+            <a:ext cx="45720" cy="45720"/>
+          </a:xfrm>
+          <a:prstGeom prst="rect">
+            <a:avLst/>
+          </a:prstGeom>
+          <a:solidFill>
+            <a:srgbClr val="7E22CE"/>
+          </a:solidFill>
+          <a:ln w="12700">
+            <a:solidFill>
+              <a:srgbClr val="7E22CE"/>
+            </a:solidFill>
+            <a:prstDash val="solid"/>
+          </a:ln>
+        </p:spPr>
+      </p:sp>
+      <p:sp>
+        <p:nvSpPr>
+          <p:cNvPr id="18" name="Shape 15"/>
+          <p:cNvSpPr/>
+          <p:nvPr/>
+        </p:nvSpPr>
+        <p:spPr>
+          <a:xfrm>
+            <a:off x="8938209" y="205740"/>
+            <a:ext cx="45720" cy="45720"/>
+          </a:xfrm>
+          <a:prstGeom prst="rect">
+            <a:avLst/>
+          </a:prstGeom>
+          <a:solidFill>
+            <a:srgbClr val="7E22CE"/>
+          </a:solidFill>
+          <a:ln w="12700">
+            <a:solidFill>
+              <a:srgbClr val="7E22CE"/>
+            </a:solidFill>
+            <a:prstDash val="solid"/>
+          </a:ln>
+        </p:spPr>
+      </p:sp>
+      <p:sp>
+        <p:nvSpPr>
+          <p:cNvPr id="19" name="Shape 16"/>
+          <p:cNvSpPr/>
+          <p:nvPr/>
+        </p:nvSpPr>
+        <p:spPr>
+          <a:xfrm>
+            <a:off x="8938209" y="283464"/>
+            <a:ext cx="45720" cy="45720"/>
+          </a:xfrm>
+          <a:prstGeom prst="rect">
+            <a:avLst/>
+          </a:prstGeom>
+          <a:solidFill>
+            <a:srgbClr val="7E22CE"/>
+          </a:solidFill>
+          <a:ln w="12700">
+            <a:solidFill>
+              <a:srgbClr val="7E22CE"/>
+            </a:solidFill>
+            <a:prstDash val="solid"/>
+          </a:ln>
+        </p:spPr>
+      </p:sp>
+      <p:pic>
+        <p:nvPicPr>
+          <p:cNvPr id="20" name="Image 1" descr="preencoded.png">    </p:cNvPr>
+          <p:cNvPicPr>
+            <a:picLocks noChangeAspect="1"/>
+          </p:cNvPicPr>
+          <p:nvPr/>
+        </p:nvPicPr>
+        <p:blipFill>
+          <a:blip r:embed="rId2"/>
+          <a:stretch>
+            <a:fillRect/>
+          </a:stretch>
+        </p:blipFill>
+        <p:spPr>
+          <a:xfrm>
+            <a:off x="9038793" y="128016"/>
+            <a:ext cx="201168" cy="201168"/>
+          </a:xfrm>
+          <a:prstGeom prst="rect">
+            <a:avLst/>
+          </a:prstGeom>
+        </p:spPr>
+      </p:pic>
+      <p:sp>
+        <p:nvSpPr>
+          <p:cNvPr id="21" name="Text 17"/>
+          <p:cNvSpPr txBox="1"/>
+          <p:nvPr/>
+        </p:nvSpPr>
+        <p:spPr>
+          <a:xfrm>
+            <a:off x="9294825" y="91440"/>
+            <a:ext cx="2311654" cy="274320"/>
+          </a:xfrm>
+          <a:prstGeom prst="rect">
+            <a:avLst/>
+          </a:prstGeom>
+          <a:noFill/>
+          <a:ln/>
+        </p:spPr>
+        <p:txBody>
+          <a:bodyPr wrap="square" lIns="0" tIns="0" rIns="0" bIns="0" rtlCol="0" anchor="ctr"/>
+          <a:lstStyle/>
+          <a:p>
+            <a:pPr indent="0" marL="0">
+              <a:buNone/>
+            </a:pPr>
+            <a:r>
+              <a:rPr lang="en-US" sz="1100" b="1" dirty="0">
+                <a:solidFill>
+                  <a:srgbClr val="6B21A8"/>
+                </a:solidFill>
+                <a:latin typeface="Calibri" pitchFamily="34" charset="0"/>
+                <a:ea typeface="Calibri" pitchFamily="34" charset="-122"/>
+                <a:cs typeface="Calibri" pitchFamily="34" charset="-120"/>
+              </a:rPr>
+              <a:t>DA COMPRENDERE PIÙ AVANTI</a:t>
+            </a:r>
+            <a:endParaRPr lang="en-US" sz="1100" dirty="0"/>
+          </a:p>
+        </p:txBody>
+      </p:sp>
+      <p:sp>
+        <p:nvSpPr>
+          <p:cNvPr id="22" name="Shape 18"/>
+          <p:cNvSpPr/>
+          <p:nvPr/>
+        </p:nvSpPr>
+        <p:spPr>
+          <a:xfrm>
+            <a:off x="6675069" y="91440"/>
+            <a:ext cx="2125980" cy="274320"/>
+          </a:xfrm>
+          <a:prstGeom prst="rect">
+            <a:avLst/>
+          </a:prstGeom>
+          <a:solidFill>
+            <a:srgbClr val="FEF3C7"/>
+          </a:solidFill>
+          <a:ln w="12700">
+            <a:solidFill>
+              <a:srgbClr val="B45309"/>
+            </a:solidFill>
+            <a:prstDash val="solid"/>
+          </a:ln>
+        </p:spPr>
+      </p:sp>
+      <p:sp>
+        <p:nvSpPr>
+          <p:cNvPr id="23" name="Shape 19"/>
+          <p:cNvSpPr/>
+          <p:nvPr/>
+        </p:nvSpPr>
+        <p:spPr>
+          <a:xfrm>
+            <a:off x="6675069" y="91440"/>
+            <a:ext cx="27432" cy="274320"/>
+          </a:xfrm>
+          <a:prstGeom prst="rect">
+            <a:avLst/>
+          </a:prstGeom>
+          <a:solidFill>
+            <a:srgbClr val="B45309"/>
+          </a:solidFill>
+          <a:ln w="12700">
+            <a:solidFill>
+              <a:srgbClr val="B45309"/>
+            </a:solidFill>
+            <a:prstDash val="solid"/>
+          </a:ln>
+        </p:spPr>
+      </p:sp>
+      <p:sp>
+        <p:nvSpPr>
+          <p:cNvPr id="24" name="Shape 20"/>
+          <p:cNvSpPr/>
+          <p:nvPr/>
+        </p:nvSpPr>
+        <p:spPr>
+          <a:xfrm>
+            <a:off x="6729933" y="91440"/>
+            <a:ext cx="27432" cy="274320"/>
+          </a:xfrm>
+          <a:prstGeom prst="rect">
+            <a:avLst/>
+          </a:prstGeom>
+          <a:solidFill>
+            <a:srgbClr val="B45309"/>
+          </a:solidFill>
+          <a:ln w="12700">
+            <a:solidFill>
+              <a:srgbClr val="B45309"/>
+            </a:solidFill>
+            <a:prstDash val="solid"/>
+          </a:ln>
+        </p:spPr>
+      </p:sp>
+      <p:pic>
+        <p:nvPicPr>
+          <p:cNvPr id="25" name="Image 2" descr="preencoded.png">    </p:cNvPr>
+          <p:cNvPicPr>
+            <a:picLocks noChangeAspect="1"/>
+          </p:cNvPicPr>
+          <p:nvPr/>
+        </p:nvPicPr>
+        <p:blipFill>
+          <a:blip r:embed="rId3"/>
+          <a:stretch>
+            <a:fillRect/>
+          </a:stretch>
+        </p:blipFill>
+        <p:spPr>
+          <a:xfrm>
+            <a:off x="6803085" y="128016"/>
+            <a:ext cx="201168" cy="201168"/>
+          </a:xfrm>
+          <a:prstGeom prst="rect">
+            <a:avLst/>
+          </a:prstGeom>
+        </p:spPr>
+      </p:pic>
+      <p:sp>
+        <p:nvSpPr>
+          <p:cNvPr id="26" name="Text 21"/>
+          <p:cNvSpPr txBox="1"/>
+          <p:nvPr/>
+        </p:nvSpPr>
+        <p:spPr>
+          <a:xfrm>
+            <a:off x="7059117" y="91440"/>
+            <a:ext cx="1705356" cy="274320"/>
+          </a:xfrm>
+          <a:prstGeom prst="rect">
+            <a:avLst/>
+          </a:prstGeom>
+          <a:noFill/>
+          <a:ln/>
+        </p:spPr>
+        <p:txBody>
+          <a:bodyPr wrap="square" lIns="0" tIns="0" rIns="0" bIns="0" rtlCol="0" anchor="ctr"/>
+          <a:lstStyle/>
+          <a:p>
+            <a:pPr indent="0" marL="0">
+              <a:buNone/>
+            </a:pPr>
+            <a:r>
+              <a:rPr lang="en-US" sz="1100" b="1" dirty="0">
+                <a:solidFill>
+                  <a:srgbClr val="92400E"/>
+                </a:solidFill>
+                <a:latin typeface="Calibri" pitchFamily="34" charset="0"/>
+                <a:ea typeface="Calibri" pitchFamily="34" charset="-122"/>
+                <a:cs typeface="Calibri" pitchFamily="34" charset="-120"/>
+              </a:rPr>
+              <a:t>DA UTILIZZARE OGGI</a:t>
+            </a:r>
+            <a:endParaRPr lang="en-US" sz="1100" dirty="0"/>
+          </a:p>
+        </p:txBody>
+      </p:sp>
+      <p:sp>
+        <p:nvSpPr>
+          <p:cNvPr id="27" name="Shape 22"/>
+          <p:cNvSpPr/>
+          <p:nvPr/>
+        </p:nvSpPr>
+        <p:spPr>
+          <a:xfrm>
+            <a:off x="4352747" y="91440"/>
+            <a:ext cx="2212594" cy="274320"/>
+          </a:xfrm>
+          <a:prstGeom prst="rect">
+            <a:avLst/>
+          </a:prstGeom>
+          <a:solidFill>
+            <a:srgbClr val="E0F2FE"/>
+          </a:solidFill>
+          <a:ln w="12700">
+            <a:solidFill>
+              <a:srgbClr val="0369A1"/>
+            </a:solidFill>
+            <a:prstDash val="solid"/>
+          </a:ln>
+        </p:spPr>
+      </p:sp>
+      <p:sp>
+        <p:nvSpPr>
+          <p:cNvPr id="28" name="Shape 23"/>
+          <p:cNvSpPr/>
+          <p:nvPr/>
+        </p:nvSpPr>
+        <p:spPr>
+          <a:xfrm>
+            <a:off x="4352747" y="91440"/>
+            <a:ext cx="73152" cy="274320"/>
+          </a:xfrm>
+          <a:prstGeom prst="rect">
+            <a:avLst/>
+          </a:prstGeom>
+          <a:solidFill>
+            <a:srgbClr val="0369A1"/>
+          </a:solidFill>
+          <a:ln w="12700">
+            <a:solidFill>
+              <a:srgbClr val="0369A1"/>
+            </a:solidFill>
+            <a:prstDash val="solid"/>
+          </a:ln>
+        </p:spPr>
+      </p:sp>
+      <p:pic>
+        <p:nvPicPr>
+          <p:cNvPr id="29" name="Image 3" descr="preencoded.png">    </p:cNvPr>
+          <p:cNvPicPr>
+            <a:picLocks noChangeAspect="1"/>
+          </p:cNvPicPr>
+          <p:nvPr/>
+        </p:nvPicPr>
+        <p:blipFill>
+          <a:blip r:embed="rId4"/>
+          <a:stretch>
+            <a:fillRect/>
+          </a:stretch>
+        </p:blipFill>
+        <p:spPr>
+          <a:xfrm>
+            <a:off x="4480763" y="128016"/>
+            <a:ext cx="201168" cy="201168"/>
+          </a:xfrm>
+          <a:prstGeom prst="rect">
+            <a:avLst/>
+          </a:prstGeom>
+        </p:spPr>
+      </p:pic>
+      <p:sp>
+        <p:nvSpPr>
+          <p:cNvPr id="30" name="Text 24"/>
+          <p:cNvSpPr txBox="1"/>
+          <p:nvPr/>
+        </p:nvSpPr>
+        <p:spPr>
+          <a:xfrm>
+            <a:off x="4736795" y="91440"/>
+            <a:ext cx="1791970" cy="274320"/>
+          </a:xfrm>
+          <a:prstGeom prst="rect">
+            <a:avLst/>
+          </a:prstGeom>
+          <a:noFill/>
+          <a:ln/>
+        </p:spPr>
+        <p:txBody>
+          <a:bodyPr wrap="square" lIns="0" tIns="0" rIns="0" bIns="0" rtlCol="0" anchor="ctr"/>
+          <a:lstStyle/>
+          <a:p>
+            <a:pPr indent="0" marL="0">
+              <a:buNone/>
+            </a:pPr>
+            <a:r>
+              <a:rPr lang="en-US" sz="1100" b="1" dirty="0">
+                <a:solidFill>
+                  <a:srgbClr val="075985"/>
+                </a:solidFill>
+                <a:latin typeface="Calibri" pitchFamily="34" charset="0"/>
+                <a:ea typeface="Calibri" pitchFamily="34" charset="-122"/>
+                <a:cs typeface="Calibri" pitchFamily="34" charset="-120"/>
+              </a:rPr>
+              <a:t>DA COMPRENDERE OGGI</a:t>
+            </a:r>
+            <a:endParaRPr lang="en-US" sz="1100" dirty="0"/>
+          </a:p>
+        </p:txBody>
+      </p:sp>
+      <p:sp>
+        <p:nvSpPr>
           <p:cNvPr id="25" name="Slide Number Placeholder 0"/>
           <p:cNvSpPr>
             <a:spLocks noGrp="1"/>
@@ -3236,6 +3659,158 @@
               <a:t>PRG32-QT: listato, registri, memoria</a:t>
             </a:r>
             <a:endParaRPr lang="en-US" sz="1200" dirty="0"/>
+          </a:p>
+        </p:txBody>
+      </p:sp>
+      <p:sp>
+        <p:nvSpPr>
+          <p:cNvPr id="13" name="Shape 10"/>
+          <p:cNvSpPr/>
+          <p:nvPr/>
+        </p:nvSpPr>
+        <p:spPr>
+          <a:xfrm>
+            <a:off x="7809941" y="91440"/>
+            <a:ext cx="3833114" cy="274320"/>
+          </a:xfrm>
+          <a:prstGeom prst="rect">
+            <a:avLst/>
+          </a:prstGeom>
+          <a:solidFill>
+            <a:srgbClr val="FEF3C7"/>
+          </a:solidFill>
+          <a:ln w="12700">
+            <a:solidFill>
+              <a:srgbClr val="B45309"/>
+            </a:solidFill>
+            <a:prstDash val="solid"/>
+          </a:ln>
+        </p:spPr>
+      </p:sp>
+      <p:sp>
+        <p:nvSpPr>
+          <p:cNvPr id="14" name="Shape 11"/>
+          <p:cNvSpPr/>
+          <p:nvPr/>
+        </p:nvSpPr>
+        <p:spPr>
+          <a:xfrm>
+            <a:off x="7809941" y="91440"/>
+            <a:ext cx="27432" cy="274320"/>
+          </a:xfrm>
+          <a:prstGeom prst="rect">
+            <a:avLst/>
+          </a:prstGeom>
+          <a:solidFill>
+            <a:srgbClr val="B45309"/>
+          </a:solidFill>
+          <a:ln w="12700">
+            <a:solidFill>
+              <a:srgbClr val="B45309"/>
+            </a:solidFill>
+            <a:prstDash val="solid"/>
+          </a:ln>
+        </p:spPr>
+      </p:sp>
+      <p:sp>
+        <p:nvSpPr>
+          <p:cNvPr id="15" name="Shape 12"/>
+          <p:cNvSpPr/>
+          <p:nvPr/>
+        </p:nvSpPr>
+        <p:spPr>
+          <a:xfrm>
+            <a:off x="7864805" y="91440"/>
+            <a:ext cx="27432" cy="274320"/>
+          </a:xfrm>
+          <a:prstGeom prst="rect">
+            <a:avLst/>
+          </a:prstGeom>
+          <a:solidFill>
+            <a:srgbClr val="B45309"/>
+          </a:solidFill>
+          <a:ln w="12700">
+            <a:solidFill>
+              <a:srgbClr val="B45309"/>
+            </a:solidFill>
+            <a:prstDash val="solid"/>
+          </a:ln>
+        </p:spPr>
+      </p:sp>
+      <p:pic>
+        <p:nvPicPr>
+          <p:cNvPr id="16" name="Image 1" descr="preencoded.png">    </p:cNvPr>
+          <p:cNvPicPr>
+            <a:picLocks noChangeAspect="1"/>
+          </p:cNvPicPr>
+          <p:nvPr/>
+        </p:nvPicPr>
+        <p:blipFill>
+          <a:blip r:embed="rId2"/>
+          <a:stretch>
+            <a:fillRect/>
+          </a:stretch>
+        </p:blipFill>
+        <p:spPr>
+          <a:xfrm>
+            <a:off x="7937957" y="128016"/>
+            <a:ext cx="201168" cy="201168"/>
+          </a:xfrm>
+          <a:prstGeom prst="rect">
+            <a:avLst/>
+          </a:prstGeom>
+        </p:spPr>
+      </p:pic>
+      <p:sp>
+        <p:nvSpPr>
+          <p:cNvPr id="17" name="Text 13"/>
+          <p:cNvSpPr txBox="1"/>
+          <p:nvPr/>
+        </p:nvSpPr>
+        <p:spPr>
+          <a:xfrm>
+            <a:off x="8193989" y="91440"/>
+            <a:ext cx="3412490" cy="274320"/>
+          </a:xfrm>
+          <a:prstGeom prst="rect">
+            <a:avLst/>
+          </a:prstGeom>
+          <a:noFill/>
+          <a:ln/>
+        </p:spPr>
+        <p:txBody>
+          <a:bodyPr wrap="square" lIns="0" tIns="0" rIns="0" bIns="0" rtlCol="0" anchor="ctr"/>
+          <a:lstStyle/>
+          <a:p>
+            <a:pPr indent="0" marL="0">
+              <a:buNone/>
+            </a:pPr>
+            <a:r>
+              <a:rPr lang="en-US" sz="1100" b="1" dirty="0">
+                <a:solidFill>
+                  <a:srgbClr val="92400E"/>
+                </a:solidFill>
+                <a:latin typeface="Calibri" pitchFamily="34" charset="0"/>
+                <a:ea typeface="Calibri" pitchFamily="34" charset="-122"/>
+                <a:cs typeface="Calibri" pitchFamily="34" charset="-120"/>
+              </a:rPr>
+              <a:t>DA UTILIZZARE OGGI</a:t>
+            </a:r>
+            <a:pPr indent="0" marL="0">
+              <a:buNone/>
+            </a:pPr>
+            <a:r>
+              <a:rPr lang="en-US" sz="1100" dirty="0">
+                <a:solidFill>
+                  <a:srgbClr val="92400E"/>
+                </a:solidFill>
+                <a:latin typeface="Calibri" pitchFamily="34" charset="0"/>
+                <a:ea typeface="Calibri" pitchFamily="34" charset="-122"/>
+                <a:cs typeface="Calibri" pitchFamily="34" charset="-120"/>
+              </a:rPr>
+              <a:t> · il debugger di PRG32-QT</a:t>
+            </a:r>
+            <a:endParaRPr lang="en-US" sz="1100" dirty="0"/>
           </a:p>
         </p:txBody>
       </p:sp>
@@ -8545,9 +9120,59 @@
           </a:p>
         </p:txBody>
       </p:sp>
+      <p:sp>
+        <p:nvSpPr>
+          <p:cNvPr id="3" name="Shape 1"/>
+          <p:cNvSpPr/>
+          <p:nvPr/>
+        </p:nvSpPr>
+        <p:spPr>
+          <a:xfrm>
+            <a:off x="7920304" y="91440"/>
+            <a:ext cx="3722751" cy="274320"/>
+          </a:xfrm>
+          <a:prstGeom prst="rect">
+            <a:avLst/>
+          </a:prstGeom>
+          <a:solidFill>
+            <a:srgbClr val="E0F2FE"/>
+          </a:solidFill>
+          <a:ln w="12700">
+            <a:solidFill>
+              <a:srgbClr val="0369A1"/>
+            </a:solidFill>
+            <a:prstDash val="solid"/>
+          </a:ln>
+        </p:spPr>
+      </p:sp>
+      <p:sp>
+        <p:nvSpPr>
+          <p:cNvPr id="4" name="Shape 2"/>
+          <p:cNvSpPr/>
+          <p:nvPr/>
+        </p:nvSpPr>
+        <p:spPr>
+          <a:xfrm>
+            <a:off x="7920304" y="91440"/>
+            <a:ext cx="73152" cy="274320"/>
+          </a:xfrm>
+          <a:prstGeom prst="rect">
+            <a:avLst/>
+          </a:prstGeom>
+          <a:solidFill>
+            <a:srgbClr val="0369A1"/>
+          </a:solidFill>
+          <a:ln w="12700">
+            <a:solidFill>
+              <a:srgbClr val="0369A1"/>
+            </a:solidFill>
+            <a:prstDash val="solid"/>
+          </a:ln>
+        </p:spPr>
+      </p:sp>
       <p:pic>
         <p:nvPicPr>
-          <p:cNvPr id="4" name="Image 0" descr="preencoded.png">    </p:cNvPr>
+          <p:cNvPr id="5" name="Image 0" descr="preencoded.png">    </p:cNvPr>
           <p:cNvPicPr>
             <a:picLocks noChangeAspect="1"/>
           </p:cNvPicPr>
@@ -8561,17 +9186,70 @@
         </p:blipFill>
         <p:spPr>
           <a:xfrm>
-            <a:off x="548640" y="1424701"/>
-            <a:ext cx="5760720" cy="1558006"/>
+            <a:off x="8048320" y="128016"/>
+            <a:ext cx="201168" cy="201168"/>
           </a:xfrm>
           <a:prstGeom prst="rect">
             <a:avLst/>
           </a:prstGeom>
         </p:spPr>
       </p:pic>
+      <p:sp>
+        <p:nvSpPr>
+          <p:cNvPr id="6" name="Text 3"/>
+          <p:cNvSpPr txBox="1"/>
+          <p:nvPr/>
+        </p:nvSpPr>
+        <p:spPr>
+          <a:xfrm>
+            <a:off x="8304352" y="91440"/>
+            <a:ext cx="3302127" cy="274320"/>
+          </a:xfrm>
+          <a:prstGeom prst="rect">
+            <a:avLst/>
+          </a:prstGeom>
+          <a:noFill/>
+          <a:ln/>
+        </p:spPr>
+        <p:txBody>
+          <a:bodyPr wrap="square" lIns="0" tIns="0" rIns="0" bIns="0" rtlCol="0" anchor="ctr"/>
+          <a:lstStyle/>
+          <a:p>
+            <a:pPr indent="0" marL="0">
+              <a:buNone/>
+            </a:pPr>
+            <a:r>
+              <a:rPr lang="en-US" sz="1100" b="1" dirty="0">
+                <a:solidFill>
+                  <a:srgbClr val="075985"/>
+                </a:solidFill>
+                <a:latin typeface="Calibri" pitchFamily="34" charset="0"/>
+                <a:ea typeface="Calibri" pitchFamily="34" charset="-122"/>
+                <a:cs typeface="Calibri" pitchFamily="34" charset="-120"/>
+              </a:rPr>
+              <a:t>DA COMPRENDERE OGGI</a:t>
+            </a:r>
+            <a:pPr indent="0" marL="0">
+              <a:buNone/>
+            </a:pPr>
+            <a:r>
+              <a:rPr lang="en-US" sz="1100" dirty="0">
+                <a:solidFill>
+                  <a:srgbClr val="075985"/>
+                </a:solidFill>
+                <a:latin typeface="Calibri" pitchFamily="34" charset="0"/>
+                <a:ea typeface="Calibri" pitchFamily="34" charset="-122"/>
+                <a:cs typeface="Calibri" pitchFamily="34" charset="-120"/>
+              </a:rPr>
+              <a:t> · gli array in memoria</a:t>
+            </a:r>
+            <a:endParaRPr lang="en-US" sz="1100" dirty="0"/>
+          </a:p>
+        </p:txBody>
+      </p:sp>
       <p:pic>
         <p:nvPicPr>
-          <p:cNvPr id="5" name="Image 1" descr="preencoded.png">    </p:cNvPr>
+          <p:cNvPr id="8" name="Image 1" descr="preencoded.png">    </p:cNvPr>
           <p:cNvPicPr>
             <a:picLocks noChangeAspect="1"/>
           </p:cNvPicPr>
@@ -8585,7 +9263,7 @@
         </p:blipFill>
         <p:spPr>
           <a:xfrm>
-            <a:off x="548640" y="3070621"/>
+            <a:off x="548640" y="1424701"/>
             <a:ext cx="5760720" cy="1558006"/>
           </a:xfrm>
           <a:prstGeom prst="rect">
@@ -8595,7 +9273,7 @@
       </p:pic>
       <p:pic>
         <p:nvPicPr>
-          <p:cNvPr id="6" name="Image 2" descr="preencoded.png">    </p:cNvPr>
+          <p:cNvPr id="9" name="Image 2" descr="preencoded.png">    </p:cNvPr>
           <p:cNvPicPr>
             <a:picLocks noChangeAspect="1"/>
           </p:cNvPicPr>
@@ -8609,6 +9287,30 @@
         </p:blipFill>
         <p:spPr>
           <a:xfrm>
+            <a:off x="548640" y="3070621"/>
+            <a:ext cx="5760720" cy="1558006"/>
+          </a:xfrm>
+          <a:prstGeom prst="rect">
+            <a:avLst/>
+          </a:prstGeom>
+        </p:spPr>
+      </p:pic>
+      <p:pic>
+        <p:nvPicPr>
+          <p:cNvPr id="10" name="Image 3" descr="preencoded.png">    </p:cNvPr>
+          <p:cNvPicPr>
+            <a:picLocks noChangeAspect="1"/>
+          </p:cNvPicPr>
+          <p:nvPr/>
+        </p:nvPicPr>
+        <p:blipFill>
+          <a:blip r:embed="rId4"/>
+          <a:stretch>
+            <a:fillRect/>
+          </a:stretch>
+        </p:blipFill>
+        <p:spPr>
+          <a:xfrm>
             <a:off x="548640" y="4716541"/>
             <a:ext cx="5760720" cy="1558006"/>
           </a:xfrm>
@@ -8619,7 +9321,7 @@
       </p:pic>
       <p:sp>
         <p:nvSpPr>
-          <p:cNvPr id="7" name="Shape 1"/>
+          <p:cNvPr id="11" name="Shape 4"/>
           <p:cNvSpPr/>
           <p:nvPr/>
         </p:nvSpPr>
@@ -8644,7 +9346,7 @@
       </p:sp>
       <p:sp>
         <p:nvSpPr>
-          <p:cNvPr id="8" name="Text 2"/>
+          <p:cNvPr id="12" name="Text 5"/>
           <p:cNvSpPr txBox="1"/>
           <p:nvPr/>
         </p:nvSpPr>
@@ -8686,7 +9388,7 @@
       </p:sp>
       <p:sp>
         <p:nvSpPr>
-          <p:cNvPr id="9" name="Shape 3"/>
+          <p:cNvPr id="13" name="Shape 6"/>
           <p:cNvSpPr/>
           <p:nvPr/>
         </p:nvSpPr>
@@ -8711,7 +9413,7 @@
       </p:sp>
       <p:sp>
         <p:nvSpPr>
-          <p:cNvPr id="10" name="Text 4"/>
+          <p:cNvPr id="14" name="Text 7"/>
           <p:cNvSpPr txBox="1"/>
           <p:nvPr/>
         </p:nvSpPr>
@@ -8753,7 +9455,7 @@
       </p:sp>
       <p:sp>
         <p:nvSpPr>
-          <p:cNvPr id="11" name="Shape 5"/>
+          <p:cNvPr id="15" name="Shape 8"/>
           <p:cNvSpPr/>
           <p:nvPr/>
         </p:nvSpPr>
@@ -8778,7 +9480,7 @@
       </p:sp>
       <p:sp>
         <p:nvSpPr>
-          <p:cNvPr id="12" name="Text 6"/>
+          <p:cNvPr id="16" name="Text 9"/>
           <p:cNvSpPr txBox="1"/>
           <p:nvPr/>
         </p:nvSpPr>
@@ -8860,7 +9562,7 @@
       </p:sp>
       <p:sp>
         <p:nvSpPr>
-          <p:cNvPr id="13" name="Shape 7"/>
+          <p:cNvPr id="17" name="Shape 10"/>
           <p:cNvSpPr/>
           <p:nvPr/>
         </p:nvSpPr>
@@ -8885,7 +9587,7 @@
       </p:sp>
       <p:sp>
         <p:nvSpPr>
-          <p:cNvPr id="14" name="Text 8"/>
+          <p:cNvPr id="18" name="Text 11"/>
           <p:cNvSpPr txBox="1"/>
           <p:nvPr/>
         </p:nvSpPr>
@@ -8927,7 +9629,7 @@
       </p:sp>
       <p:sp>
         <p:nvSpPr>
-          <p:cNvPr id="15" name="Shape 9"/>
+          <p:cNvPr id="19" name="Shape 12"/>
           <p:cNvSpPr/>
           <p:nvPr/>
         </p:nvSpPr>
@@ -8952,7 +9654,7 @@
       </p:sp>
       <p:sp>
         <p:nvSpPr>
-          <p:cNvPr id="16" name="Text 10"/>
+          <p:cNvPr id="20" name="Text 13"/>
           <p:cNvSpPr txBox="1"/>
           <p:nvPr/>
         </p:nvSpPr>
@@ -9588,6 +10290,133 @@
       </p:sp>
       <p:sp>
         <p:nvSpPr>
+          <p:cNvPr id="16" name="Shape 14"/>
+          <p:cNvSpPr/>
+          <p:nvPr/>
+        </p:nvSpPr>
+        <p:spPr>
+          <a:xfrm>
+            <a:off x="7920304" y="91440"/>
+            <a:ext cx="3722751" cy="274320"/>
+          </a:xfrm>
+          <a:prstGeom prst="rect">
+            <a:avLst/>
+          </a:prstGeom>
+          <a:solidFill>
+            <a:srgbClr val="E0F2FE"/>
+          </a:solidFill>
+          <a:ln w="12700">
+            <a:solidFill>
+              <a:srgbClr val="0369A1"/>
+            </a:solidFill>
+            <a:prstDash val="solid"/>
+          </a:ln>
+        </p:spPr>
+      </p:sp>
+      <p:sp>
+        <p:nvSpPr>
+          <p:cNvPr id="17" name="Shape 15"/>
+          <p:cNvSpPr/>
+          <p:nvPr/>
+        </p:nvSpPr>
+        <p:spPr>
+          <a:xfrm>
+            <a:off x="7920304" y="91440"/>
+            <a:ext cx="73152" cy="274320"/>
+          </a:xfrm>
+          <a:prstGeom prst="rect">
+            <a:avLst/>
+          </a:prstGeom>
+          <a:solidFill>
+            <a:srgbClr val="0369A1"/>
+          </a:solidFill>
+          <a:ln w="12700">
+            <a:solidFill>
+              <a:srgbClr val="0369A1"/>
+            </a:solidFill>
+            <a:prstDash val="solid"/>
+          </a:ln>
+        </p:spPr>
+      </p:sp>
+      <p:pic>
+        <p:nvPicPr>
+          <p:cNvPr id="18" name="Image 0" descr="preencoded.png">    </p:cNvPr>
+          <p:cNvPicPr>
+            <a:picLocks noChangeAspect="1"/>
+          </p:cNvPicPr>
+          <p:nvPr/>
+        </p:nvPicPr>
+        <p:blipFill>
+          <a:blip r:embed="rId1"/>
+          <a:stretch>
+            <a:fillRect/>
+          </a:stretch>
+        </p:blipFill>
+        <p:spPr>
+          <a:xfrm>
+            <a:off x="8048320" y="128016"/>
+            <a:ext cx="201168" cy="201168"/>
+          </a:xfrm>
+          <a:prstGeom prst="rect">
+            <a:avLst/>
+          </a:prstGeom>
+        </p:spPr>
+      </p:pic>
+      <p:sp>
+        <p:nvSpPr>
+          <p:cNvPr id="19" name="Text 16"/>
+          <p:cNvSpPr txBox="1"/>
+          <p:nvPr/>
+        </p:nvSpPr>
+        <p:spPr>
+          <a:xfrm>
+            <a:off x="8304352" y="91440"/>
+            <a:ext cx="3302127" cy="274320"/>
+          </a:xfrm>
+          <a:prstGeom prst="rect">
+            <a:avLst/>
+          </a:prstGeom>
+          <a:noFill/>
+          <a:ln/>
+        </p:spPr>
+        <p:txBody>
+          <a:bodyPr wrap="square" lIns="0" tIns="0" rIns="0" bIns="0" rtlCol="0" anchor="ctr"/>
+          <a:lstStyle/>
+          <a:p>
+            <a:pPr indent="0" marL="0">
+              <a:buNone/>
+            </a:pPr>
+            <a:r>
+              <a:rPr lang="en-US" sz="1100" b="1" dirty="0">
+                <a:solidFill>
+                  <a:srgbClr val="075985"/>
+                </a:solidFill>
+                <a:latin typeface="Calibri" pitchFamily="34" charset="0"/>
+                <a:ea typeface="Calibri" pitchFamily="34" charset="-122"/>
+                <a:cs typeface="Calibri" pitchFamily="34" charset="-120"/>
+              </a:rPr>
+              <a:t>DA COMPRENDERE OGGI</a:t>
+            </a:r>
+            <a:pPr indent="0" marL="0">
+              <a:buNone/>
+            </a:pPr>
+            <a:r>
+              <a:rPr lang="en-US" sz="1100" dirty="0">
+                <a:solidFill>
+                  <a:srgbClr val="075985"/>
+                </a:solidFill>
+                <a:latin typeface="Calibri" pitchFamily="34" charset="0"/>
+                <a:ea typeface="Calibri" pitchFamily="34" charset="-122"/>
+                <a:cs typeface="Calibri" pitchFamily="34" charset="-120"/>
+              </a:rPr>
+              <a:t> · gli array in memoria</a:t>
+            </a:r>
+            <a:endParaRPr lang="en-US" sz="1100" dirty="0"/>
+          </a:p>
+        </p:txBody>
+      </p:sp>
+      <p:sp>
+        <p:nvSpPr>
           <p:cNvPr id="25" name="Slide Number Placeholder 0"/>
           <p:cNvSpPr>
             <a:spLocks noGrp="1"/>
@@ -9700,9 +10529,59 @@
           </a:p>
         </p:txBody>
       </p:sp>
+      <p:sp>
+        <p:nvSpPr>
+          <p:cNvPr id="3" name="Shape 1"/>
+          <p:cNvSpPr/>
+          <p:nvPr/>
+        </p:nvSpPr>
+        <p:spPr>
+          <a:xfrm>
+            <a:off x="7723327" y="91440"/>
+            <a:ext cx="3919728" cy="274320"/>
+          </a:xfrm>
+          <a:prstGeom prst="rect">
+            <a:avLst/>
+          </a:prstGeom>
+          <a:solidFill>
+            <a:srgbClr val="E0F2FE"/>
+          </a:solidFill>
+          <a:ln w="12700">
+            <a:solidFill>
+              <a:srgbClr val="0369A1"/>
+            </a:solidFill>
+            <a:prstDash val="solid"/>
+          </a:ln>
+        </p:spPr>
+      </p:sp>
+      <p:sp>
+        <p:nvSpPr>
+          <p:cNvPr id="4" name="Shape 2"/>
+          <p:cNvSpPr/>
+          <p:nvPr/>
+        </p:nvSpPr>
+        <p:spPr>
+          <a:xfrm>
+            <a:off x="7723327" y="91440"/>
+            <a:ext cx="73152" cy="274320"/>
+          </a:xfrm>
+          <a:prstGeom prst="rect">
+            <a:avLst/>
+          </a:prstGeom>
+          <a:solidFill>
+            <a:srgbClr val="0369A1"/>
+          </a:solidFill>
+          <a:ln w="12700">
+            <a:solidFill>
+              <a:srgbClr val="0369A1"/>
+            </a:solidFill>
+            <a:prstDash val="solid"/>
+          </a:ln>
+        </p:spPr>
+      </p:sp>
       <p:pic>
         <p:nvPicPr>
-          <p:cNvPr id="4" name="Image 0" descr="preencoded.png">    </p:cNvPr>
+          <p:cNvPr id="5" name="Image 0" descr="preencoded.png">    </p:cNvPr>
           <p:cNvPicPr>
             <a:picLocks noChangeAspect="1"/>
           </p:cNvPicPr>
@@ -9716,6 +10595,83 @@
         </p:blipFill>
         <p:spPr>
           <a:xfrm>
+            <a:off x="7851343" y="128016"/>
+            <a:ext cx="201168" cy="201168"/>
+          </a:xfrm>
+          <a:prstGeom prst="rect">
+            <a:avLst/>
+          </a:prstGeom>
+        </p:spPr>
+      </p:pic>
+      <p:sp>
+        <p:nvSpPr>
+          <p:cNvPr id="6" name="Text 3"/>
+          <p:cNvSpPr txBox="1"/>
+          <p:nvPr/>
+        </p:nvSpPr>
+        <p:spPr>
+          <a:xfrm>
+            <a:off x="8107375" y="91440"/>
+            <a:ext cx="3499104" cy="274320"/>
+          </a:xfrm>
+          <a:prstGeom prst="rect">
+            <a:avLst/>
+          </a:prstGeom>
+          <a:noFill/>
+          <a:ln/>
+        </p:spPr>
+        <p:txBody>
+          <a:bodyPr wrap="square" lIns="0" tIns="0" rIns="0" bIns="0" rtlCol="0" anchor="ctr"/>
+          <a:lstStyle/>
+          <a:p>
+            <a:pPr indent="0" marL="0">
+              <a:buNone/>
+            </a:pPr>
+            <a:r>
+              <a:rPr lang="en-US" sz="1100" b="1" dirty="0">
+                <a:solidFill>
+                  <a:srgbClr val="075985"/>
+                </a:solidFill>
+                <a:latin typeface="Calibri" pitchFamily="34" charset="0"/>
+                <a:ea typeface="Calibri" pitchFamily="34" charset="-122"/>
+                <a:cs typeface="Calibri" pitchFamily="34" charset="-120"/>
+              </a:rPr>
+              <a:t>DA COMPRENDERE OGGI</a:t>
+            </a:r>
+            <a:pPr indent="0" marL="0">
+              <a:buNone/>
+            </a:pPr>
+            <a:r>
+              <a:rPr lang="en-US" sz="1100" dirty="0">
+                <a:solidFill>
+                  <a:srgbClr val="075985"/>
+                </a:solidFill>
+                <a:latin typeface="Calibri" pitchFamily="34" charset="0"/>
+                <a:ea typeface="Calibri" pitchFamily="34" charset="-122"/>
+                <a:cs typeface="Calibri" pitchFamily="34" charset="-120"/>
+              </a:rPr>
+              <a:t> · macchine a stati finiti</a:t>
+            </a:r>
+            <a:endParaRPr lang="en-US" sz="1100" dirty="0"/>
+          </a:p>
+        </p:txBody>
+      </p:sp>
+      <p:pic>
+        <p:nvPicPr>
+          <p:cNvPr id="8" name="Image 1" descr="preencoded.png">    </p:cNvPr>
+          <p:cNvPicPr>
+            <a:picLocks noChangeAspect="1"/>
+          </p:cNvPicPr>
+          <p:nvPr/>
+        </p:nvPicPr>
+        <p:blipFill>
+          <a:blip r:embed="rId2"/>
+          <a:stretch>
+            <a:fillRect/>
+          </a:stretch>
+        </p:blipFill>
+        <p:spPr>
+          <a:xfrm>
             <a:off x="560682" y="1417320"/>
             <a:ext cx="5736635" cy="3154680"/>
           </a:xfrm>
@@ -9726,7 +10682,7 @@
       </p:pic>
       <p:sp>
         <p:nvSpPr>
-          <p:cNvPr id="5" name="Shape 1"/>
+          <p:cNvPr id="9" name="Shape 4"/>
           <p:cNvSpPr/>
           <p:nvPr/>
         </p:nvSpPr>
@@ -9751,7 +10707,7 @@
       </p:sp>
       <p:sp>
         <p:nvSpPr>
-          <p:cNvPr id="6" name="Text 2"/>
+          <p:cNvPr id="10" name="Text 5"/>
           <p:cNvSpPr txBox="1"/>
           <p:nvPr/>
         </p:nvSpPr>
@@ -9793,7 +10749,7 @@
       </p:sp>
       <p:sp>
         <p:nvSpPr>
-          <p:cNvPr id="7" name="Shape 3"/>
+          <p:cNvPr id="11" name="Shape 6"/>
           <p:cNvSpPr/>
           <p:nvPr/>
         </p:nvSpPr>
@@ -9818,7 +10774,7 @@
       </p:sp>
       <p:sp>
         <p:nvSpPr>
-          <p:cNvPr id="8" name="Text 4"/>
+          <p:cNvPr id="12" name="Text 7"/>
           <p:cNvSpPr txBox="1"/>
           <p:nvPr/>
         </p:nvSpPr>
@@ -9860,7 +10816,7 @@
       </p:sp>
       <p:sp>
         <p:nvSpPr>
-          <p:cNvPr id="9" name="Shape 5"/>
+          <p:cNvPr id="13" name="Shape 8"/>
           <p:cNvSpPr/>
           <p:nvPr/>
         </p:nvSpPr>
@@ -9885,7 +10841,7 @@
       </p:sp>
       <p:sp>
         <p:nvSpPr>
-          <p:cNvPr id="10" name="Text 6"/>
+          <p:cNvPr id="14" name="Text 9"/>
           <p:cNvSpPr txBox="1"/>
           <p:nvPr/>
         </p:nvSpPr>
@@ -9927,7 +10883,7 @@
       </p:sp>
       <p:sp>
         <p:nvSpPr>
-          <p:cNvPr id="11" name="Shape 7"/>
+          <p:cNvPr id="15" name="Shape 10"/>
           <p:cNvSpPr/>
           <p:nvPr/>
         </p:nvSpPr>
@@ -9952,7 +10908,7 @@
       </p:sp>
       <p:sp>
         <p:nvSpPr>
-          <p:cNvPr id="12" name="Text 8"/>
+          <p:cNvPr id="16" name="Text 11"/>
           <p:cNvSpPr txBox="1"/>
           <p:nvPr/>
         </p:nvSpPr>
@@ -11765,6 +12721,158 @@
               <a:t>Mangiate, e confrontate head_i e length prima e dopo: crescono entrambi di uno</a:t>
             </a:r>
             <a:endParaRPr lang="en-US" sz="2200" dirty="0"/>
+          </a:p>
+        </p:txBody>
+      </p:sp>
+      <p:sp>
+        <p:nvSpPr>
+          <p:cNvPr id="15" name="Shape 13"/>
+          <p:cNvSpPr/>
+          <p:nvPr/>
+        </p:nvSpPr>
+        <p:spPr>
+          <a:xfrm>
+            <a:off x="7809941" y="91440"/>
+            <a:ext cx="3833114" cy="274320"/>
+          </a:xfrm>
+          <a:prstGeom prst="rect">
+            <a:avLst/>
+          </a:prstGeom>
+          <a:solidFill>
+            <a:srgbClr val="FEF3C7"/>
+          </a:solidFill>
+          <a:ln w="12700">
+            <a:solidFill>
+              <a:srgbClr val="B45309"/>
+            </a:solidFill>
+            <a:prstDash val="solid"/>
+          </a:ln>
+        </p:spPr>
+      </p:sp>
+      <p:sp>
+        <p:nvSpPr>
+          <p:cNvPr id="16" name="Shape 14"/>
+          <p:cNvSpPr/>
+          <p:nvPr/>
+        </p:nvSpPr>
+        <p:spPr>
+          <a:xfrm>
+            <a:off x="7809941" y="91440"/>
+            <a:ext cx="27432" cy="274320"/>
+          </a:xfrm>
+          <a:prstGeom prst="rect">
+            <a:avLst/>
+          </a:prstGeom>
+          <a:solidFill>
+            <a:srgbClr val="B45309"/>
+          </a:solidFill>
+          <a:ln w="12700">
+            <a:solidFill>
+              <a:srgbClr val="B45309"/>
+            </a:solidFill>
+            <a:prstDash val="solid"/>
+          </a:ln>
+        </p:spPr>
+      </p:sp>
+      <p:sp>
+        <p:nvSpPr>
+          <p:cNvPr id="17" name="Shape 15"/>
+          <p:cNvSpPr/>
+          <p:nvPr/>
+        </p:nvSpPr>
+        <p:spPr>
+          <a:xfrm>
+            <a:off x="7864805" y="91440"/>
+            <a:ext cx="27432" cy="274320"/>
+          </a:xfrm>
+          <a:prstGeom prst="rect">
+            <a:avLst/>
+          </a:prstGeom>
+          <a:solidFill>
+            <a:srgbClr val="B45309"/>
+          </a:solidFill>
+          <a:ln w="12700">
+            <a:solidFill>
+              <a:srgbClr val="B45309"/>
+            </a:solidFill>
+            <a:prstDash val="solid"/>
+          </a:ln>
+        </p:spPr>
+      </p:sp>
+      <p:pic>
+        <p:nvPicPr>
+          <p:cNvPr id="18" name="Image 0" descr="preencoded.png">    </p:cNvPr>
+          <p:cNvPicPr>
+            <a:picLocks noChangeAspect="1"/>
+          </p:cNvPicPr>
+          <p:nvPr/>
+        </p:nvPicPr>
+        <p:blipFill>
+          <a:blip r:embed="rId1"/>
+          <a:stretch>
+            <a:fillRect/>
+          </a:stretch>
+        </p:blipFill>
+        <p:spPr>
+          <a:xfrm>
+            <a:off x="7937957" y="128016"/>
+            <a:ext cx="201168" cy="201168"/>
+          </a:xfrm>
+          <a:prstGeom prst="rect">
+            <a:avLst/>
+          </a:prstGeom>
+        </p:spPr>
+      </p:pic>
+      <p:sp>
+        <p:nvSpPr>
+          <p:cNvPr id="19" name="Text 16"/>
+          <p:cNvSpPr txBox="1"/>
+          <p:nvPr/>
+        </p:nvSpPr>
+        <p:spPr>
+          <a:xfrm>
+            <a:off x="8193989" y="91440"/>
+            <a:ext cx="3412490" cy="274320"/>
+          </a:xfrm>
+          <a:prstGeom prst="rect">
+            <a:avLst/>
+          </a:prstGeom>
+          <a:noFill/>
+          <a:ln/>
+        </p:spPr>
+        <p:txBody>
+          <a:bodyPr wrap="square" lIns="0" tIns="0" rIns="0" bIns="0" rtlCol="0" anchor="ctr"/>
+          <a:lstStyle/>
+          <a:p>
+            <a:pPr indent="0" marL="0">
+              <a:buNone/>
+            </a:pPr>
+            <a:r>
+              <a:rPr lang="en-US" sz="1100" b="1" dirty="0">
+                <a:solidFill>
+                  <a:srgbClr val="92400E"/>
+                </a:solidFill>
+                <a:latin typeface="Calibri" pitchFamily="34" charset="0"/>
+                <a:ea typeface="Calibri" pitchFamily="34" charset="-122"/>
+                <a:cs typeface="Calibri" pitchFamily="34" charset="-120"/>
+              </a:rPr>
+              <a:t>DA UTILIZZARE OGGI</a:t>
+            </a:r>
+            <a:pPr indent="0" marL="0">
+              <a:buNone/>
+            </a:pPr>
+            <a:r>
+              <a:rPr lang="en-US" sz="1100" dirty="0">
+                <a:solidFill>
+                  <a:srgbClr val="92400E"/>
+                </a:solidFill>
+                <a:latin typeface="Calibri" pitchFamily="34" charset="0"/>
+                <a:ea typeface="Calibri" pitchFamily="34" charset="-122"/>
+                <a:cs typeface="Calibri" pitchFamily="34" charset="-120"/>
+              </a:rPr>
+              <a:t> · il debugger di PRG32-QT</a:t>
+            </a:r>
+            <a:endParaRPr lang="en-US" sz="1100" dirty="0"/>
           </a:p>
         </p:txBody>
       </p:sp>
@@ -14343,6 +15451,158 @@
               <a:t>s1 vale 0x10 in un solo frame: quello in cui il pulsante scende.</a:t>
             </a:r>
             <a:endParaRPr lang="en-US" sz="1500" dirty="0"/>
+          </a:p>
+        </p:txBody>
+      </p:sp>
+      <p:sp>
+        <p:nvSpPr>
+          <p:cNvPr id="5" name="Shape 2"/>
+          <p:cNvSpPr/>
+          <p:nvPr/>
+        </p:nvSpPr>
+        <p:spPr>
+          <a:xfrm>
+            <a:off x="7809941" y="91440"/>
+            <a:ext cx="3833114" cy="274320"/>
+          </a:xfrm>
+          <a:prstGeom prst="rect">
+            <a:avLst/>
+          </a:prstGeom>
+          <a:solidFill>
+            <a:srgbClr val="FEF3C7"/>
+          </a:solidFill>
+          <a:ln w="12700">
+            <a:solidFill>
+              <a:srgbClr val="B45309"/>
+            </a:solidFill>
+            <a:prstDash val="solid"/>
+          </a:ln>
+        </p:spPr>
+      </p:sp>
+      <p:sp>
+        <p:nvSpPr>
+          <p:cNvPr id="6" name="Shape 3"/>
+          <p:cNvSpPr/>
+          <p:nvPr/>
+        </p:nvSpPr>
+        <p:spPr>
+          <a:xfrm>
+            <a:off x="7809941" y="91440"/>
+            <a:ext cx="27432" cy="274320"/>
+          </a:xfrm>
+          <a:prstGeom prst="rect">
+            <a:avLst/>
+          </a:prstGeom>
+          <a:solidFill>
+            <a:srgbClr val="B45309"/>
+          </a:solidFill>
+          <a:ln w="12700">
+            <a:solidFill>
+              <a:srgbClr val="B45309"/>
+            </a:solidFill>
+            <a:prstDash val="solid"/>
+          </a:ln>
+        </p:spPr>
+      </p:sp>
+      <p:sp>
+        <p:nvSpPr>
+          <p:cNvPr id="7" name="Shape 4"/>
+          <p:cNvSpPr/>
+          <p:nvPr/>
+        </p:nvSpPr>
+        <p:spPr>
+          <a:xfrm>
+            <a:off x="7864805" y="91440"/>
+            <a:ext cx="27432" cy="274320"/>
+          </a:xfrm>
+          <a:prstGeom prst="rect">
+            <a:avLst/>
+          </a:prstGeom>
+          <a:solidFill>
+            <a:srgbClr val="B45309"/>
+          </a:solidFill>
+          <a:ln w="12700">
+            <a:solidFill>
+              <a:srgbClr val="B45309"/>
+            </a:solidFill>
+            <a:prstDash val="solid"/>
+          </a:ln>
+        </p:spPr>
+      </p:sp>
+      <p:pic>
+        <p:nvPicPr>
+          <p:cNvPr id="8" name="Image 0" descr="preencoded.png">    </p:cNvPr>
+          <p:cNvPicPr>
+            <a:picLocks noChangeAspect="1"/>
+          </p:cNvPicPr>
+          <p:nvPr/>
+        </p:nvPicPr>
+        <p:blipFill>
+          <a:blip r:embed="rId1"/>
+          <a:stretch>
+            <a:fillRect/>
+          </a:stretch>
+        </p:blipFill>
+        <p:spPr>
+          <a:xfrm>
+            <a:off x="7937957" y="128016"/>
+            <a:ext cx="201168" cy="201168"/>
+          </a:xfrm>
+          <a:prstGeom prst="rect">
+            <a:avLst/>
+          </a:prstGeom>
+        </p:spPr>
+      </p:pic>
+      <p:sp>
+        <p:nvSpPr>
+          <p:cNvPr id="9" name="Text 5"/>
+          <p:cNvSpPr txBox="1"/>
+          <p:nvPr/>
+        </p:nvSpPr>
+        <p:spPr>
+          <a:xfrm>
+            <a:off x="8193989" y="91440"/>
+            <a:ext cx="3412490" cy="274320"/>
+          </a:xfrm>
+          <a:prstGeom prst="rect">
+            <a:avLst/>
+          </a:prstGeom>
+          <a:noFill/>
+          <a:ln/>
+        </p:spPr>
+        <p:txBody>
+          <a:bodyPr wrap="square" lIns="0" tIns="0" rIns="0" bIns="0" rtlCol="0" anchor="ctr"/>
+          <a:lstStyle/>
+          <a:p>
+            <a:pPr indent="0" marL="0">
+              <a:buNone/>
+            </a:pPr>
+            <a:r>
+              <a:rPr lang="en-US" sz="1100" b="1" dirty="0">
+                <a:solidFill>
+                  <a:srgbClr val="92400E"/>
+                </a:solidFill>
+                <a:latin typeface="Calibri" pitchFamily="34" charset="0"/>
+                <a:ea typeface="Calibri" pitchFamily="34" charset="-122"/>
+                <a:cs typeface="Calibri" pitchFamily="34" charset="-120"/>
+              </a:rPr>
+              <a:t>DA UTILIZZARE OGGI</a:t>
+            </a:r>
+            <a:pPr indent="0" marL="0">
+              <a:buNone/>
+            </a:pPr>
+            <a:r>
+              <a:rPr lang="en-US" sz="1100" dirty="0">
+                <a:solidFill>
+                  <a:srgbClr val="92400E"/>
+                </a:solidFill>
+                <a:latin typeface="Calibri" pitchFamily="34" charset="0"/>
+                <a:ea typeface="Calibri" pitchFamily="34" charset="-122"/>
+                <a:cs typeface="Calibri" pitchFamily="34" charset="-120"/>
+              </a:rPr>
+              <a:t> · il debugger di PRG32-QT</a:t>
+            </a:r>
+            <a:endParaRPr lang="en-US" sz="1100" dirty="0"/>
           </a:p>
         </p:txBody>
       </p:sp>

--- a/it/slides/17-Architettura_dei_Calcolatori-Verm1_Parte_3.pptx
+++ b/it/slides/17-Architettura_dei_Calcolatori-Verm1_Parte_3.pptx
@@ -119,7 +119,7 @@
   <p:extLst>
     <p:ext uri="{521415D9-36F7-43E2-AB2F-B90AF26B5E84}">
       <p14:sectionLst xmlns:p14="http://schemas.microsoft.com/office/powerpoint/2010/main">
-        <p14:section name="Apertura" id="{1a41598b-ef18-fbb0-8fe9-0797f446dc68}">
+        <p14:section name="Apertura" id="{7c6484bc-b678-9333-b186-17e272b01689}">
           <p14:sldIdLst>
             <p14:sldId id="256"/>
             <p14:sldId id="257"/>
@@ -127,14 +127,14 @@
             <p14:sldId id="259"/>
           </p14:sldIdLst>
         </p14:section>
-        <p14:section name="Il progetto, prima del codice" id="{d5a93d58-537b-c0af-1b0a-42f609269ee0}">
+        <p14:section name="Il progetto, prima del codice" id="{ba3d3070-291c-3ebf-2849-e9c883313434}">
           <p14:sldIdLst>
             <p14:sldId id="260"/>
             <p14:sldId id="261"/>
             <p14:sldId id="262"/>
           </p14:sldIdLst>
         </p14:section>
-        <p14:section name="Passo 5: guardare la memoria muoversi" id="{fdf6cd32-6966-0cb1-37aa-45d2dc7e6eb6}">
+        <p14:section name="Passo 5: guardare la memoria muoversi" id="{6eccf59a-d28a-20ea-567d-6f34fc71d92b}">
           <p14:sldIdLst>
             <p14:sldId id="263"/>
             <p14:sldId id="264"/>

--- a/it/slides/17-Architettura_dei_Calcolatori-Verm1_Parte_3.pptx
+++ b/it/slides/17-Architettura_dei_Calcolatori-Verm1_Parte_3.pptx
@@ -119,7 +119,7 @@
   <p:extLst>
     <p:ext uri="{521415D9-36F7-43E2-AB2F-B90AF26B5E84}">
       <p14:sectionLst xmlns:p14="http://schemas.microsoft.com/office/powerpoint/2010/main">
-        <p14:section name="Apertura" id="{7c6484bc-b678-9333-b186-17e272b01689}">
+        <p14:section name="Apertura" id="{b8bc11b4-e2c1-d9f4-faf9-8ba6cd5b4db8}">
           <p14:sldIdLst>
             <p14:sldId id="256"/>
             <p14:sldId id="257"/>
@@ -127,14 +127,14 @@
             <p14:sldId id="259"/>
           </p14:sldIdLst>
         </p14:section>
-        <p14:section name="Il progetto, prima del codice" id="{ba3d3070-291c-3ebf-2849-e9c883313434}">
+        <p14:section name="Il progetto, prima del codice" id="{f8a4efb3-3a39-a45a-43c6-09d0d4b46111}">
           <p14:sldIdLst>
             <p14:sldId id="260"/>
             <p14:sldId id="261"/>
             <p14:sldId id="262"/>
           </p14:sldIdLst>
         </p14:section>
-        <p14:section name="Passo 5: guardare la memoria muoversi" id="{6eccf59a-d28a-20ea-567d-6f34fc71d92b}">
+        <p14:section name="Passo 5: guardare la memoria muoversi" id="{c39bdc5e-92a1-94cb-7ad8-6665307b252d}">
           <p14:sldIdLst>
             <p14:sldId id="263"/>
             <p14:sldId id="264"/>
@@ -548,7 +548,7 @@
           <a:p>
             <a:r>
               <a:rPr lang="en-US" dirty="0"/>
-              <a:t>Il terzo tutorial trasforma Verm1 in un vero gioco. Finora il verme era una sola cella e niente poteva andare storto. Oggi nel progetto entra la memoria: il verme prende un corpo che segue la testa e cresce, mordersi fa finire la partita, e il programma acquista una schermata del titolo e una di fine partita. La frase di Brooks in copertina è il motto del giorno: scegliete bene le strutture dati, e il codice quasi si scrive da solo. Ne incontrerete due, un anello e una mappa.
+              <a:t>Il terzo tutorial trasforma Verm1 in un vero gioco. Finora il verme era una sola cella e nulla poteva andare storto. Oggi la memoria entra nel progetto: il verme acquista un corpo che segue la testa e cresce, mordersi pone fine alla partita, e il programma guadagna una schermata del titolo e una di fine partita. La frase di Fred Brooks in copertina è il principio guida della sessione: si scelgano bene le strutture dati, e il codice si scrive quasi da sé. Si introducono due di queste strutture, un anello e una mappa, e il tutorial è in gran parte uno studio di come il loro progetto dia forma al codice.
 Stato di apprendimento: DA COMPRENDERE OGGI, alla fine di questa lezione lo spiegate, lo seguite passo passo e lo applicate da soli; DA UTILIZZARE OGGI, oggi seguite e usate la ricetta; come funziona dentro si spiega più avanti, o non fa parte del corso; DA COMPRENDERE PIÙ AVANTI, riconoscete il nome e lo scopo; lo spiega una lezione successiva. Una slide senza etichetta è contesto: una storia, un esempio, una domanda, un esercizio.
 Stato di apprendimento di questa lezione. DA COMPRENDERE OGGI: gli array in memoria; macchine a stati finiti; .text, .rodata, .data; latch e flip-flop; la virgola fissa. DA UTILIZZARE OGGI: la convenzione di chiamata (Lezione 18) e, usati senza essere studiati nel corso, gli strumenti di PRG32, il debugger di PRG32-QT. DA COMPRENDERE PIÙ AVANTI: niente. Una slide senza etichetta è contesto: una storia, un esempio, una domanda, un esercizio.
 Per il docente: Terzo tutorial del progetto. Usa le Lezioni da 13 a 16: macchine a stati finiti e rilevamento del fronte (13), registri che conservano il valore precedente (14), la memoria come vettore di byte, indirizzi e indici (15), ciò che resta nel file della cartuccia e ciò che si perde allo spegnimento (16). Il file di riferimento è verm1/verm1_part3.S. La citazione è la seconda metà dell'osservazione di Brooks su diagrammi di flusso e tabelle: con «strutture dati» al posto di «tabelle» è il motto di questa parte.</a:t>
@@ -639,7 +639,7 @@
           <a:p>
             <a:r>
               <a:rPr lang="en-US" dirty="0"/>
-              <a:t>Tre domande a cui rispondere con il debugger. Dov'è state, e che cosa contiene mentre giocate e perdete? La mappa è coerente con l'anello: il byte alla riga per 40 più la colonna della testa contiene 1? Che cosa ha visto il passo fatale: alla lbu dopo la seconda mul in step, t1 vale 1 una volta sola, al morso. L'ultima riga è un principio: un programma è giusto quando è giusta la sua memoria.
+              <a:t>Tre domande a cui rispondere con il debugger. Dov'è state, e che cosa contiene durante il gioco e dopo aver perso? La mappa è coerente con l'anello, cioè il byte in riga × 40 + colonna della testa contiene 1? Che cosa ha osservato il passo fatale: all'lbu dopo la seconda mul in step, t1 vale 1 esattamente una volta, al morso. L'ultima riga enuncia un principio che va ben oltre questo gioco: un programma è corretto quando la sua memoria è corretta, e i suoi invarianti sono ciò che rende la memoria verificabile.
 DA UTILIZZARE OGGI: il debugger di PRG32-QT (si usa, non si studia, in questo corso).
 Per il docente: La terza domanda è la più istruttiva: s0 e s1 contengono la cella in cui la testa voleva entrare, e lo schermo mostra che fa parte del corpo.</a:t>
             </a:r>
@@ -729,8 +729,8 @@
           <a:p>
             <a:r>
               <a:rPr lang="en-US" dirty="0"/>
-              <a:t>Calcolate prima la coda: head_i - length + 1 è 1 meno 4 più 1, cioè meno 2. Mascherato con 255 diventa 254. Da lì contate quattro elementi in avanti, rientrando dopo il 255.
-La formula della mappa: riga per 40 più colonna. Non scambiate le due: l'opzione con 283 è 7 per 40 più 3.
+              <a:t>Per la prima domanda si calcola prima la coda: head_i - length + 1 è 1 - 4 + 1 = -2, che mascherato con 255 diventa 254. Da lì si contano quattro voci in avanti, ricominciando dopo 255.
+Per la seconda vale la formula della mappa: riga × 40 + colonna. Le due non vanno scambiate; l'opzione con 283 è 7 × 40 + 3.
 Per il docente: 1. Risposta: C. Dalla coda, head_i - length + 1 = -2, cioè 254 dopo AND 255, fino alla testa: 254, 255, 0, 1.
 2. Risposta: B. 3 x 40 + 7 = 127.</a:t>
             </a:r>
@@ -820,8 +820,8 @@
           <a:p>
             <a:r>
               <a:rPr lang="en-US" dirty="0"/>
-              <a:t>Ragionate in termini di fronti. A è giù per molti frame, ma solo nel primo è «giù adesso e su un frame fa».
-In un passo la coda lascia una cella e la testa ne occupa una. Se sono la stessa cella, quale delle due operazioni va fatta per prima perché la mossa sia lecita?
+              <a:t>Per la prima domanda si ragiona in termini di fronti. A resta premuto per molti frame, ma solo nel primo di essi è "premuto ora e rilasciato un frame fa".
+Per la seconda: in un passo la coda libera una cella e la testa ne occupa una. Se sono la stessa cella, la domanda è quale delle due operazioni debba venire prima perché la mossa sia lecita.
 Per il docente: 1. Risposta: B. Solo il frame in cui A scende dà s1 = 0x10: un fronte, una transizione.
 2. Risposta: B. Nello stesso passo la coda si sposta: quella cella è libera per la testa.</a:t>
             </a:r>
@@ -911,7 +911,7 @@
           <a:p>
             <a:r>
               <a:rPr lang="en-US" dirty="0"/>
-              <a:t>Dove siete. Verm1 ora è un gioco, con uno scopo, un rischio, un inizio e una fine, e ne sapete spiegare ogni riga. È logica sequenziale e memoria scritte come programma: una macchina a tre stati, un anello di byte, una mappa. Tre cose sono ancora grezze: l'intero schermo viene ridisegnato a ogni frame, il punteggio è una fila di tacche, la velocità non cambia mai. Le prossime quattro lezioni aprono la macchina che esegue il vostro codice, e la Parte 4 finisce il gioco.
+              <a:t>La situazione attuale. Verm1 è ora un gioco, con un obiettivo, un rischio, un inizio e una fine, e ogni sua riga si può spiegare. È logica sequenziale e memoria espresse come programma: una macchina a tre stati, un anello di byte, una mappa. Restano tre aspetti grezzi: l'intero schermo viene ridisegnato a ogni frame, il punteggio è una fila di tacche, e la velocità non cambia mai. Le prossime quattro lezioni aprono la macchina che esegue il codice, e la Parte 4 completa il gioco.
 Stato di apprendimento, riepilogo. DA COMPRENDERE OGGI: gli array in memoria; macchine a stati finiti; .text, .rodata, .data; latch e flip-flop; la virgola fissa. DA UTILIZZARE OGGI: la convenzione di chiamata (Lezione 18) e, usati senza essere studiati nel corso, gli strumenti di PRG32, il debugger di PRG32-QT. DA COMPRENDERE PIÙ AVANTI: niente. Una slide senza etichetta è contesto: una storia, un esempio, una domanda, un esercizio.
 Per il docente: Gli studenti hanno ora circa 450 righe di assembly che hanno scritto e sanno spiegare. Le prossime quattro lezioni aprono la macchina che le esegue.</a:t>
             </a:r>
@@ -1001,7 +1001,7 @@
           <a:p>
             <a:r>
               <a:rPr lang="en-US" dirty="0"/>
-              <a:t>Cinque risultati. Un verme con un corpo che segue la testa e cresce di una cella a ogni pasto. Un gioco che si può perdere. Tre schermate, titolo, gioco e game over, collegate dal pulsante A. Il cibo che non compare mai sul verme. E un punteggio migliore, conservato finché la cartuccia resta in memoria. È il passo più grande del progetto: il file circa raddoppia di lunghezza, quindi seguite i passi ed eseguite il programma ogni volta che una slide lo dice.</a:t>
+              <a:t>Cinque risultati. Un verme con un corpo che segue la testa e cresce di una cella a ogni pasto. Un gioco che si può perdere. Tre schermate, titolo, gioco e fine partita, collegate dal pulsante A. Un cibo che non compare mai sul verme. E un punteggio migliore, conservato finché la cartuccia resta in memoria. È il passo più grande del progetto: il file raddoppia circa di lunghezza, quindi i passi vanno seguiti in ordine e il programma eseguito ogni volta che una slide lo chiede.</a:t>
             </a:r>
             <a:endParaRPr lang="en-US" dirty="0"/>
           </a:p>
@@ -1089,7 +1089,7 @@
           <a:p>
             <a:r>
               <a:rPr lang="en-US" dirty="0"/>
-              <a:t>Le idee del blocco su stato e memoria, e dove compaiono oggi. La macchina a stati finiti della Lezione 13 diventa i tre stati del gioco. Il fronte, un cambiamento e non un livello, diventa «A premuto adesso e non un frame fa». Il registro che conserva un valore per il clock successivo diventa prev_btn. La memoria come vettore di byte diventa il corpo e la mappa del mondo. E la differenza tra ciò che resta nel file e ciò che vive in RAM diventa .rodata, .data e il punteggio migliore.
+              <a:t>Le idee del blocco su stato e memoria, e dove compaiono oggi. La macchina a stati finiti della Lezione 13 diventa i tre stati del gioco. Il fronte, un cambiamento e non un livello, diventa "A premuto ora e non un frame fa". Il registro che conserva un valore fino al clock successivo diventa prev_btn. La memoria come array di byte, dalla Lezione 15, diventa il corpo e la mappa del mondo. E la distinzione tra ciò che resta nel file e ciò che vive in RAM, dalla Lezione 16, diventa .rodata, .data e il punteggio migliore.
 Per il docente: Il frame è il clock della nostra macchina: update calcola lo stato prossimo dallo stato presente e dagli ingressi, esattamente come nella Lezione 13.</a:t>
             </a:r>
             <a:endParaRPr lang="en-US" dirty="0"/>
@@ -1178,7 +1178,7 @@
           <a:p>
             <a:r>
               <a:rPr lang="en-US" dirty="0"/>
-              <a:t>Le tre schermate che state per costruire: il titolo con il suo invito, il gioco con un verme di sette celle dopo quattro pasti, e il game over. Sono un solo programma in tre stati. Partite da una Parte 2 che gira; se la vostra non gira, copiate il file di riferimento della Parte 2.
+              <a:t>Le tre schermate da costruire: il titolo con il suo invito, il gioco con un verme di sette celle dopo quattro pasti, e la schermata di fine partita. Sono un solo programma in tre stati. La sessione parte da una Parte 2 funzionante; uno studente il cui file non gira copia il file di riferimento della Parte 2.
 Per il docente: Schermate prodotte da tools/tests/verm1_check.py con un giocatore programmato.</a:t>
             </a:r>
             <a:endParaRPr lang="en-US" dirty="0"/>
@@ -1267,7 +1267,7 @@
           <a:p>
             <a:r>
               <a:rPr lang="en-US" dirty="0"/>
-              <a:t>Il corpo è memorizzato in due vettori di 256 byte, body_x e body_y: l'elemento k contiene la colonna e la riga di un segmento. Non si sposta mai nulla. Due numeri descrivono il verme: head_i, l'elemento della testa, e length, il numero di elementi in uso; la coda è l'elemento head_i - length + 1. Un passo scrive un elemento nuovo dopo la testa e fa avanzare head_i. Se il verme ha mangiato la coda resta; altrimenti avanza anche lei. Dopo l'elemento 255 viene l'elemento 0, cioè un AND con 255: il vettore è un anello.
+              <a:t>Il corpo è memorizzato in due array di 256 byte, body_x e body_y, e la voce k contiene colonna e riga di un segmento. Nulla viene mai fatto scorrere. Due numeri descrivono il verme: head_i, l'indice della testa, e length, il numero di voci in uso, così che la coda sia la voce head_i - length + 1. Un passo scrive una nuova voce dopo la testa e fa avanzare head_i; se il verme ha mangiato la coda resta, altrimenti avanza anch'essa. Dopo la voce 255 viene la voce 0, un AND con 255: l'array è un anello, o buffer circolare. Ogni passo costa un tempo costante, qualunque sia la lunghezza del verme.
 DA COMPRENDERE OGGI: gli array in memoria.
 Per il docente: Un buffer circolare, la struttura che sta dietro ogni coda FIFO (first in, first out); l'aritmetica degli indirizzi è quella della Lezione 15. Muovere un verme di 200 celle costa quanto muoverne uno di 3. La dimensione 256 è scelta perché il ritorno a capo sia un solo AND: una potenza di due.</a:t>
             </a:r>
@@ -1357,7 +1357,7 @@
           <a:p>
             <a:r>
               <a:rPr lang="en-US" dirty="0"/>
-              <a:t>Per sapere se la nuova testa tocca il corpo, il programma potrebbe confrontarla con ogni segmento: fino a 255 confronti a ogni passo. Tiene invece una mappa del mondo: un byte per ciascuna delle 960 celle, 1 se c'è un segmento e 0 se no. La cella in colonna c della riga r è il byte numero r per 40 più c. Un passo pone a 1 un byte e ne azzera uno, e il test di collisione diventa un solo load. È il classico scambio di memoria con tempo. Il prezzo: mappa e anello devono essere sempre d'accordo.
+              <a:t>Per stabilire se la nuova testa tocca il corpo, il programma potrebbe confrontarla con ogni segmento, fino a 255 confronti per passo. Tiene invece una mappa del mondo: un byte per ciascuna delle 960 celle, 1 se un segmento la occupa e 0 altrimenti. La cella nella colonna c della riga r è il byte r × 40 + c. Un passo pone a 1 un byte e ne azzera un altro, e il test di collisione diventa un solo caricamento. È il classico scambio di memoria con tempo. Il suo prezzo è un invariante da mantenere: mappa e anello devono sempre concordare.
 DA COMPRENDERE OGGI: gli array in memoria.
 Per il docente: Memoria in cambio di tempo: lo scambio classico. La mappa e l'anello dicono la stessa cosa in due modi, e il programma deve tenerli coerenti: ogni scrittura nell'una è accoppiata a una scrittura nell'altro.</a:t>
             </a:r>
@@ -1447,7 +1447,7 @@
           <a:p>
             <a:r>
               <a:rPr lang="en-US" dirty="0"/>
-              <a:t>Il diagramma degli stati del gioco, come nella Lezione 13: TITLE va a PLAY quando si preme A; PLAY va a OVER quando il verme si morde; OVER torna a TITLE quando si preme A. La tabella aggiunge l'azione di ogni transizione. Un dettaglio decide se la macchina funziona: «A premuto» significa giù adesso e su un frame fa, un fronte e non un livello. Altrimenti tenendo premuto A si attraverserebbero gli stati uno per frame.
+              <a:t>Il diagramma degli stati del gioco, come nella Lezione 13: TITLE passa a PLAY quando si preme A; PLAY passa a OVER quando il verme si morde; OVER torna a TITLE quando si preme A. La tabella aggiunge l'azione associata a ogni transizione. Un dettaglio decide se la macchina funziona: "A premuto" deve significare premuto ora e rilasciato un frame fa, un fronte e non un livello. Altrimenti tenere premuto A attraverserebbe gli stati al ritmo di uno per frame, il difetto anticipato nel riscaldamento della Lezione 13.
 DA COMPRENDERE OGGI: macchine a stati finiti.
 Per il docente: Il diagramma e la tabella della Lezione 13, per il nostro gioco. In ogni altro caso lo stato non cambia. Disegnarlo alla lavagna prima di mostrare il codice: il codice è una trascrizione.</a:t>
             </a:r>
@@ -1537,7 +1537,7 @@
           <a:p>
             <a:r>
               <a:rPr lang="en-US" dirty="0"/>
-              <a:t>Mettete un breakpoint sulla prima istruzione di step e riprendete: il programma ora si ferma una volta per passo del verme. Aprite la memoria all'indirizzo di body_x: dopo l'iniziale 03 04 05 compare un byte nuovo a ogni passo. Girate verso il basso: body_x ripete la stessa colonna, mentre body_y, 256 byte più avanti, conta le righe. Mangiate, e confrontate head_i e length prima e dopo: sono cresciuti entrambi di uno. I vecchi byte non vengono mai cancellati: l'anello conserva la storia degli ultimi 256 passi.
+              <a:t>Si pone un breakpoint sulla prima istruzione di step e si riprende l'esecuzione: il programma ora si ferma una volta per passo del verme. Si apre la vista della memoria all'indirizzo di body_x: dopo i 03 04 05 iniziali, a ogni passo compare un nuovo byte. Girando verso il basso, body_x ripete la stessa colonna mentre body_y, 256 byte più avanti, conta le righe. Dopo un pasto si confrontano head_i e length prima e dopo: entrambi sono aumentati di uno. I vecchi byte non si cancellano mai, così l'anello registra la storia degli ultimi 256 passi.
 DA UTILIZZARE OGGI: il debugger di PRG32-QT (si usa, non si studia, in questo corso).
 Per il docente: I byte delle vecchie posizioni non vengono mai cancellati: l'anello conserva tutta la storia degli ultimi 256 passi, e length dice quanta di essa è ancora verme. Dopo 256 passi la scrittura ricomincia dal primo byte.</a:t>
             </a:r>
@@ -1627,7 +1627,7 @@
           <a:p>
             <a:r>
               <a:rPr lang="en-US" dirty="0"/>
-              <a:t>Il fronte del pulsante A, frame per frame. Finché A è su tutto vale zero. Nel frame in cui A scende, s0 vale 0x10 e prev_btn vale ancora 0: l'AND con la negazione dà 0x10, e la transizione avviene. Nei frame successivi A è ancora giù, ma ora anche prev_btn vale 0x10, e il risultato è zero. Un fronte, una transizione, per quanto a lungo si tenga premuto il pulsante.
+              <a:t>Il fronte del pulsante A, frame per frame. Finché A è rilasciato, tutto è zero. Nel frame in cui A viene premuto, s0 vale 0x10 e prev_btn vale ancora 0: l'AND con la negazione dà 0x10, e la transizione avviene. Nei frame successivi A resta premuto, ma ora anche prev_btn vale 0x10, e il risultato è zero. Un fronte, una transizione, per quanto a lungo si tenga premuto il pulsante: il rilevatore di fronti della Lezione 13, con una parola di memoria come flip-flop e il frame come clock.
 DA UTILIZZARE OGGI: il debugger di PRG32-QT (si usa, non si studia, in questo corso).
 Per il docente: Mettere un breakpoint su and s1, s0, t1 in verm1_update, tenere premuto A e premere Resume tre volte: s1 vale 0x10 in un solo frame. Il test del file di riferimento tiene premuto A per 28 frame e verifica che avvenga esattamente una transizione.</a:t>
             </a:r>
@@ -2746,7 +2746,7 @@
                 <a:ea typeface="Calibri" pitchFamily="34" charset="-122"/>
                 <a:cs typeface="Calibri" pitchFamily="34" charset="-120"/>
               </a:rPr>
-              <a:t>17-Architettura_dei_Calcolatori-Verm1_Parte_3-Codice.pptx</a:t>
+              <a:t>17-Architettura_dei_Calcolatori-Verm1_Parte_3-Lab.pptx</a:t>
             </a:r>
             <a:endParaRPr lang="en-US" sz="1300" dirty="0"/>
           </a:p>

--- a/it/slides/17-Architettura_dei_Calcolatori-Verm1_Parte_3.pptx
+++ b/it/slides/17-Architettura_dei_Calcolatori-Verm1_Parte_3.pptx
@@ -119,7 +119,7 @@
   <p:extLst>
     <p:ext uri="{521415D9-36F7-43E2-AB2F-B90AF26B5E84}">
       <p14:sectionLst xmlns:p14="http://schemas.microsoft.com/office/powerpoint/2010/main">
-        <p14:section name="Apertura" id="{b8bc11b4-e2c1-d9f4-faf9-8ba6cd5b4db8}">
+        <p14:section name="Apertura" id="{433faabe-9634-688b-a83c-fb6a632c3b28}">
           <p14:sldIdLst>
             <p14:sldId id="256"/>
             <p14:sldId id="257"/>
@@ -127,14 +127,14 @@
             <p14:sldId id="259"/>
           </p14:sldIdLst>
         </p14:section>
-        <p14:section name="Il progetto, prima del codice" id="{f8a4efb3-3a39-a45a-43c6-09d0d4b46111}">
+        <p14:section name="Il progetto, prima del codice" id="{6b3353d0-461a-3254-bab5-fe2faafc0134}">
           <p14:sldIdLst>
             <p14:sldId id="260"/>
             <p14:sldId id="261"/>
             <p14:sldId id="262"/>
           </p14:sldIdLst>
         </p14:section>
-        <p14:section name="Passo 5: guardare la memoria muoversi" id="{c39bdc5e-92a1-94cb-7ad8-6665307b252d}">
+        <p14:section name="Passo 5: guardare la memoria muoversi" id="{89bc16f6-95a8-36fa-5303-560bc4d08e08}">
           <p14:sldIdLst>
             <p14:sldId id="263"/>
             <p14:sldId id="264"/>

--- a/it/slides/17-Architettura_dei_Calcolatori-Verm1_Parte_3.pptx
+++ b/it/slides/17-Architettura_dei_Calcolatori-Verm1_Parte_3.pptx
@@ -119,7 +119,7 @@
   <p:extLst>
     <p:ext uri="{521415D9-36F7-43E2-AB2F-B90AF26B5E84}">
       <p14:sectionLst xmlns:p14="http://schemas.microsoft.com/office/powerpoint/2010/main">
-        <p14:section name="Apertura" id="{433faabe-9634-688b-a83c-fb6a632c3b28}">
+        <p14:section name="Apertura" id="{8daafcd8-ab21-60d4-ce4f-465c54884dee}">
           <p14:sldIdLst>
             <p14:sldId id="256"/>
             <p14:sldId id="257"/>
@@ -127,14 +127,14 @@
             <p14:sldId id="259"/>
           </p14:sldIdLst>
         </p14:section>
-        <p14:section name="Il progetto, prima del codice" id="{6b3353d0-461a-3254-bab5-fe2faafc0134}">
+        <p14:section name="Il progetto, prima del codice" id="{be22d199-6fac-6615-b2a9-add5b4fbc9df}">
           <p14:sldIdLst>
             <p14:sldId id="260"/>
             <p14:sldId id="261"/>
             <p14:sldId id="262"/>
           </p14:sldIdLst>
         </p14:section>
-        <p14:section name="Passo 5: guardare la memoria muoversi" id="{89bc16f6-95a8-36fa-5303-560bc4d08e08}">
+        <p14:section name="Passo 5: guardare la memoria muoversi" id="{08eaed5d-ea35-08dc-9b00-1c971f4fb1bf}">
           <p14:sldIdLst>
             <p14:sldId id="263"/>
             <p14:sldId id="264"/>
@@ -551,6 +551,7 @@
               <a:t>Il terzo tutorial trasforma Verm1 in un vero gioco. Finora il verme era una sola cella e nulla poteva andare storto. Oggi la memoria entra nel progetto: il verme acquista un corpo che segue la testa e cresce, mordersi pone fine alla partita, e il programma guadagna una schermata del titolo e una di fine partita. La frase di Fred Brooks in copertina è il principio guida della sessione: si scelgano bene le strutture dati, e il codice si scrive quasi da sé. Si introducono due di queste strutture, un anello e una mappa, e il tutorial è in gran parte uno studio di come il loro progetto dia forma al codice.
 Stato di apprendimento: DA COMPRENDERE OGGI, alla fine di questa lezione lo spiegate, lo seguite passo passo e lo applicate da soli; DA UTILIZZARE OGGI, oggi seguite e usate la ricetta; come funziona dentro si spiega più avanti, o non fa parte del corso; DA COMPRENDERE PIÙ AVANTI, riconoscete il nome e lo scopo; lo spiega una lezione successiva. Una slide senza etichetta è contesto: una storia, un esempio, una domanda, un esercizio.
 Stato di apprendimento di questa lezione. DA COMPRENDERE OGGI: gli array in memoria; macchine a stati finiti; .text, .rodata, .data; latch e flip-flop; la virgola fissa. DA UTILIZZARE OGGI: la convenzione di chiamata (Lezione 18) e, usati senza essere studiati nel corso, gli strumenti di PRG32, il debugger di PRG32-QT. DA COMPRENDERE PIÙ AVANTI: niente. Una slide senza etichetta è contesto: una storia, un esempio, una domanda, un esercizio.
+Percorso. I risultati di oggi: (1) realizzare il gioco come macchina a stati con tre stati; (2) tenere il corpo in un buffer circolare e la griglia in un array di byte; (3) riconoscere una collisione leggendo la griglia. Si appoggia su: gli array in memoria (Lezione 04); macchine a stati finiti (Lezione 13); .text, .rodata, .data (Lezione 07); latch e flip-flop (Lezione 13); la virgola fissa (Lezione 06). Prossimo passo: Lezione 18, Il processore.
 Per il docente: Terzo tutorial del progetto. Usa le Lezioni da 13 a 16: macchine a stati finiti e rilevamento del fronte (13), registri che conservano il valore precedente (14), la memoria come vettore di byte, indirizzi e indici (15), ciò che resta nel file della cartuccia e ciò che si perde allo spegnimento (16). Il file di riferimento è verm1/verm1_part3.S. La citazione è la seconda metà dell'osservazione di Brooks su diagrammi di flusso e tabelle: con «strutture dati» al posto di «tabelle» è il motto di questa parte.</a:t>
             </a:r>
             <a:endParaRPr lang="en-US" dirty="0"/>
@@ -912,7 +913,7 @@
             <a:r>
               <a:rPr lang="en-US" dirty="0"/>
               <a:t>La situazione attuale. Verm1 è ora un gioco, con un obiettivo, un rischio, un inizio e una fine, e ogni sua riga si può spiegare. È logica sequenziale e memoria espresse come programma: una macchina a tre stati, un anello di byte, una mappa. Restano tre aspetti grezzi: l'intero schermo viene ridisegnato a ogni frame, il punteggio è una fila di tacche, e la velocità non cambia mai. Le prossime quattro lezioni aprono la macchina che esegue il codice, e la Parte 4 completa il gioco.
-Stato di apprendimento, riepilogo. DA COMPRENDERE OGGI: gli array in memoria; macchine a stati finiti; .text, .rodata, .data; latch e flip-flop; la virgola fissa. DA UTILIZZARE OGGI: la convenzione di chiamata (Lezione 18) e, usati senza essere studiati nel corso, gli strumenti di PRG32, il debugger di PRG32-QT. DA COMPRENDERE PIÙ AVANTI: niente. Una slide senza etichetta è contesto: una storia, un esempio, una domanda, un esercizio.
+Stato di apprendimento, riepilogo. DA COMPRENDERE OGGI: gli array in memoria; macchine a stati finiti; .text, .rodata, .data; latch e flip-flop; la virgola fissa. DA UTILIZZARE OGGI: la convenzione di chiamata (Lezione 18) e, usati senza essere studiati nel corso, gli strumenti di PRG32, il debugger di PRG32-QT. DA COMPRENDERE PIÙ AVANTI: niente. Una slide senza etichetta è contesto: una storia, un esempio, una domanda, un esercizio. Il filo della lezione: Il gioco ha ora una memoria e degli stati: le macchine sequenziali della Lezione 13, scritte in software. Prossimo passo: il processore che esegue tutto questo. Biglietto d'uscita (da due a quattro minuti, da soli, su carta): 1. Verm1 ha tre stati: TITLE, PLAY, OVER. Disegnate le transizioni ed etichettate ciascuna con l'evento che la provoca. 2. Il corpo è un anello di 256 elementi. head_i vale 255 e il verme fa un passo. Quanto vale il nuovo head_i, e perché Verm1 lo calcola con andi t1, t1, 255?
 Per il docente: Gli studenti hanno ora circa 450 righe di assembly che hanno scritto e sanno spiegare. Le prossime quattro lezioni aprono la macchina che le esegue.</a:t>
             </a:r>
             <a:endParaRPr lang="en-US" dirty="0"/>
